--- a/ゲーム科2年/00_前期/ゲーム開発Ⅰ/ゲーム物理学/座学/07_一次元の運動.pptx
+++ b/ゲーム科2年/00_前期/ゲーム開発Ⅰ/ゲーム物理学/座学/07_一次元の運動.pptx
@@ -10,14 +10,13 @@
     <p:sldId id="259" r:id="rId4"/>
     <p:sldId id="260" r:id="rId5"/>
     <p:sldId id="261" r:id="rId6"/>
-    <p:sldId id="262" r:id="rId7"/>
-    <p:sldId id="264" r:id="rId8"/>
-    <p:sldId id="263" r:id="rId9"/>
-    <p:sldId id="265" r:id="rId10"/>
-    <p:sldId id="266" r:id="rId11"/>
-    <p:sldId id="267" r:id="rId12"/>
-    <p:sldId id="268" r:id="rId13"/>
-    <p:sldId id="269" r:id="rId14"/>
+    <p:sldId id="264" r:id="rId7"/>
+    <p:sldId id="263" r:id="rId8"/>
+    <p:sldId id="265" r:id="rId9"/>
+    <p:sldId id="266" r:id="rId10"/>
+    <p:sldId id="267" r:id="rId11"/>
+    <p:sldId id="268" r:id="rId12"/>
+    <p:sldId id="269" r:id="rId13"/>
   </p:sldIdLst>
   <p:sldSz cx="12192000" cy="6858000"/>
   <p:notesSz cx="6858000" cy="9144000"/>
@@ -271,7 +270,7 @@
           <a:p>
             <a:fld id="{E9CC885B-4903-4D54-9A93-00025F12DED9}" type="datetimeFigureOut">
               <a:rPr kumimoji="1" lang="ja-JP" altLang="en-US" smtClean="0"/>
-              <a:t>2024/11/21</a:t>
+              <a:t>2025/3/5</a:t>
             </a:fld>
             <a:endParaRPr kumimoji="1" lang="ja-JP" altLang="en-US"/>
           </a:p>
@@ -501,7 +500,7 @@
           <a:p>
             <a:fld id="{E9CC885B-4903-4D54-9A93-00025F12DED9}" type="datetimeFigureOut">
               <a:rPr kumimoji="1" lang="ja-JP" altLang="en-US" smtClean="0"/>
-              <a:t>2024/11/21</a:t>
+              <a:t>2025/3/5</a:t>
             </a:fld>
             <a:endParaRPr kumimoji="1" lang="ja-JP" altLang="en-US"/>
           </a:p>
@@ -741,7 +740,7 @@
           <a:p>
             <a:fld id="{E9CC885B-4903-4D54-9A93-00025F12DED9}" type="datetimeFigureOut">
               <a:rPr kumimoji="1" lang="ja-JP" altLang="en-US" smtClean="0"/>
-              <a:t>2024/11/21</a:t>
+              <a:t>2025/3/5</a:t>
             </a:fld>
             <a:endParaRPr kumimoji="1" lang="ja-JP" altLang="en-US"/>
           </a:p>
@@ -971,7 +970,7 @@
           <a:p>
             <a:fld id="{E9CC885B-4903-4D54-9A93-00025F12DED9}" type="datetimeFigureOut">
               <a:rPr kumimoji="1" lang="ja-JP" altLang="en-US" smtClean="0"/>
-              <a:t>2024/11/21</a:t>
+              <a:t>2025/3/5</a:t>
             </a:fld>
             <a:endParaRPr kumimoji="1" lang="ja-JP" altLang="en-US"/>
           </a:p>
@@ -1246,7 +1245,7 @@
           <a:p>
             <a:fld id="{E9CC885B-4903-4D54-9A93-00025F12DED9}" type="datetimeFigureOut">
               <a:rPr kumimoji="1" lang="ja-JP" altLang="en-US" smtClean="0"/>
-              <a:t>2024/11/21</a:t>
+              <a:t>2025/3/5</a:t>
             </a:fld>
             <a:endParaRPr kumimoji="1" lang="ja-JP" altLang="en-US"/>
           </a:p>
@@ -1575,7 +1574,7 @@
           <a:p>
             <a:fld id="{E9CC885B-4903-4D54-9A93-00025F12DED9}" type="datetimeFigureOut">
               <a:rPr kumimoji="1" lang="ja-JP" altLang="en-US" smtClean="0"/>
-              <a:t>2024/11/21</a:t>
+              <a:t>2025/3/5</a:t>
             </a:fld>
             <a:endParaRPr kumimoji="1" lang="ja-JP" altLang="en-US"/>
           </a:p>
@@ -2051,7 +2050,7 @@
           <a:p>
             <a:fld id="{E9CC885B-4903-4D54-9A93-00025F12DED9}" type="datetimeFigureOut">
               <a:rPr kumimoji="1" lang="ja-JP" altLang="en-US" smtClean="0"/>
-              <a:t>2024/11/21</a:t>
+              <a:t>2025/3/5</a:t>
             </a:fld>
             <a:endParaRPr kumimoji="1" lang="ja-JP" altLang="en-US"/>
           </a:p>
@@ -2192,7 +2191,7 @@
           <a:p>
             <a:fld id="{E9CC885B-4903-4D54-9A93-00025F12DED9}" type="datetimeFigureOut">
               <a:rPr kumimoji="1" lang="ja-JP" altLang="en-US" smtClean="0"/>
-              <a:t>2024/11/21</a:t>
+              <a:t>2025/3/5</a:t>
             </a:fld>
             <a:endParaRPr kumimoji="1" lang="ja-JP" altLang="en-US"/>
           </a:p>
@@ -2305,7 +2304,7 @@
           <a:p>
             <a:fld id="{E9CC885B-4903-4D54-9A93-00025F12DED9}" type="datetimeFigureOut">
               <a:rPr kumimoji="1" lang="ja-JP" altLang="en-US" smtClean="0"/>
-              <a:t>2024/11/21</a:t>
+              <a:t>2025/3/5</a:t>
             </a:fld>
             <a:endParaRPr kumimoji="1" lang="ja-JP" altLang="en-US"/>
           </a:p>
@@ -2648,7 +2647,7 @@
           <a:p>
             <a:fld id="{E9CC885B-4903-4D54-9A93-00025F12DED9}" type="datetimeFigureOut">
               <a:rPr kumimoji="1" lang="ja-JP" altLang="en-US" smtClean="0"/>
-              <a:t>2024/11/21</a:t>
+              <a:t>2025/3/5</a:t>
             </a:fld>
             <a:endParaRPr kumimoji="1" lang="ja-JP" altLang="en-US"/>
           </a:p>
@@ -2936,7 +2935,7 @@
           <a:p>
             <a:fld id="{E9CC885B-4903-4D54-9A93-00025F12DED9}" type="datetimeFigureOut">
               <a:rPr kumimoji="1" lang="ja-JP" altLang="en-US" smtClean="0"/>
-              <a:t>2024/11/21</a:t>
+              <a:t>2025/3/5</a:t>
             </a:fld>
             <a:endParaRPr kumimoji="1" lang="ja-JP" altLang="en-US"/>
           </a:p>
@@ -3209,7 +3208,7 @@
           <a:p>
             <a:fld id="{E9CC885B-4903-4D54-9A93-00025F12DED9}" type="datetimeFigureOut">
               <a:rPr kumimoji="1" lang="ja-JP" altLang="en-US" smtClean="0"/>
-              <a:t>2024/11/21</a:t>
+              <a:t>2025/3/5</a:t>
             </a:fld>
             <a:endParaRPr kumimoji="1" lang="ja-JP" altLang="en-US"/>
           </a:p>
@@ -3841,803 +3840,8 @@
           </a:p>
         </p:txBody>
       </p:sp>
-      <mc:AlternateContent xmlns:mc="http://schemas.openxmlformats.org/markup-compatibility/2006">
-        <mc:Choice xmlns:a14="http://schemas.microsoft.com/office/drawing/2010/main" Requires="a14">
-          <p:sp>
-            <p:nvSpPr>
-              <p:cNvPr id="5" name="テキスト ボックス 4">
-                <a:extLst>
-                  <a:ext uri="{FF2B5EF4-FFF2-40B4-BE49-F238E27FC236}">
-                    <a16:creationId xmlns:a16="http://schemas.microsoft.com/office/drawing/2014/main" id="{B1AEA830-DE7C-46CA-B059-02154763F37C}"/>
-                  </a:ext>
-                </a:extLst>
-              </p:cNvPr>
-              <p:cNvSpPr txBox="1"/>
-              <p:nvPr/>
-            </p:nvSpPr>
-            <p:spPr>
-              <a:xfrm>
-                <a:off x="567542" y="1217490"/>
-                <a:ext cx="10948831" cy="3786806"/>
-              </a:xfrm>
-              <a:prstGeom prst="rect">
-                <a:avLst/>
-              </a:prstGeom>
-              <a:noFill/>
-            </p:spPr>
-            <p:txBody>
-              <a:bodyPr wrap="none" rtlCol="0">
-                <a:spAutoFit/>
-              </a:bodyPr>
-              <a:lstStyle/>
-              <a:p>
-                <a:r>
-                  <a:rPr lang="ja-JP" altLang="en-US" sz="2400" dirty="0"/>
-                  <a:t>ゲーム中の岩が高台から落ちるとき、</a:t>
-                </a:r>
-                <a:r>
-                  <a:rPr lang="en-US" altLang="ja-JP" sz="2400" dirty="0"/>
-                  <a:t>50m</a:t>
-                </a:r>
-                <a:r>
-                  <a:rPr lang="ja-JP" altLang="en-US" sz="2400" dirty="0"/>
-                  <a:t>下の地面に落ちるまで何秒かかるか</a:t>
-                </a:r>
-                <a:endParaRPr lang="en-US" altLang="ja-JP" sz="2400" dirty="0"/>
-              </a:p>
-              <a:p>
-                <a:endParaRPr lang="en-US" altLang="ja-JP" sz="2400" dirty="0"/>
-              </a:p>
-              <a:p>
-                <a:r>
-                  <a:rPr lang="ja-JP" altLang="en-US" sz="2400" b="1" dirty="0">
-                    <a:solidFill>
-                      <a:srgbClr val="FF0000"/>
-                    </a:solidFill>
-                  </a:rPr>
-                  <a:t>■解答</a:t>
-                </a:r>
-                <a:endParaRPr lang="en-US" altLang="ja-JP" sz="2400" b="1" dirty="0">
-                  <a:solidFill>
-                    <a:srgbClr val="FF0000"/>
-                  </a:solidFill>
-                </a:endParaRPr>
-              </a:p>
-              <a:p>
-                <a14:m>
-                  <m:oMath xmlns:m="http://schemas.openxmlformats.org/officeDocument/2006/math">
-                    <m:r>
-                      <a:rPr lang="en-US" altLang="ja-JP" sz="2400" b="0" i="1" dirty="0" smtClean="0">
-                        <a:solidFill>
-                          <a:schemeClr val="tx1"/>
-                        </a:solidFill>
-                        <a:latin typeface="Cambria Math" panose="02040503050406030204" pitchFamily="18" charset="0"/>
-                      </a:rPr>
-                      <m:t>−50</m:t>
-                    </m:r>
-                    <m:r>
-                      <a:rPr lang="en-US" altLang="ja-JP" sz="2400" b="0" i="1" dirty="0" smtClean="0">
-                        <a:solidFill>
-                          <a:schemeClr val="tx1"/>
-                        </a:solidFill>
-                        <a:latin typeface="Cambria Math" panose="02040503050406030204" pitchFamily="18" charset="0"/>
-                      </a:rPr>
-                      <m:t>𝑚</m:t>
-                    </m:r>
-                    <m:r>
-                      <a:rPr lang="en-US" altLang="ja-JP" sz="2400" b="0" i="1" smtClean="0">
-                        <a:latin typeface="Cambria Math" panose="02040503050406030204" pitchFamily="18" charset="0"/>
-                      </a:rPr>
-                      <m:t>=0</m:t>
-                    </m:r>
-                    <m:r>
-                      <a:rPr lang="en-US" altLang="ja-JP" sz="2400" b="0" i="1" smtClean="0">
-                        <a:latin typeface="Cambria Math" panose="02040503050406030204" pitchFamily="18" charset="0"/>
-                      </a:rPr>
-                      <m:t>𝑡</m:t>
-                    </m:r>
-                    <m:r>
-                      <a:rPr lang="en-US" altLang="ja-JP" sz="2400" b="0" i="1" smtClean="0">
-                        <a:latin typeface="Cambria Math" panose="02040503050406030204" pitchFamily="18" charset="0"/>
-                      </a:rPr>
-                      <m:t>+</m:t>
-                    </m:r>
-                    <m:f>
-                      <m:fPr>
-                        <m:ctrlPr>
-                          <a:rPr lang="en-US" altLang="ja-JP" sz="2400" i="1" smtClean="0">
-                            <a:latin typeface="Cambria Math" panose="02040503050406030204" pitchFamily="18" charset="0"/>
-                          </a:rPr>
-                        </m:ctrlPr>
-                      </m:fPr>
-                      <m:num>
-                        <m:r>
-                          <a:rPr lang="en-US" altLang="ja-JP" sz="2400" b="0" i="1" smtClean="0">
-                            <a:latin typeface="Cambria Math" panose="02040503050406030204" pitchFamily="18" charset="0"/>
-                          </a:rPr>
-                          <m:t>1</m:t>
-                        </m:r>
-                      </m:num>
-                      <m:den>
-                        <m:r>
-                          <a:rPr lang="en-US" altLang="ja-JP" sz="2400" b="0" i="1" smtClean="0">
-                            <a:latin typeface="Cambria Math" panose="02040503050406030204" pitchFamily="18" charset="0"/>
-                          </a:rPr>
-                          <m:t>2</m:t>
-                        </m:r>
-                      </m:den>
-                    </m:f>
-                    <m:d>
-                      <m:dPr>
-                        <m:ctrlPr>
-                          <a:rPr lang="en-US" altLang="ja-JP" sz="2400" b="0" i="1" smtClean="0">
-                            <a:latin typeface="Cambria Math" panose="02040503050406030204" pitchFamily="18" charset="0"/>
-                          </a:rPr>
-                        </m:ctrlPr>
-                      </m:dPr>
-                      <m:e>
-                        <m:r>
-                          <a:rPr lang="en-US" altLang="ja-JP" sz="2400" i="1">
-                            <a:latin typeface="Cambria Math" panose="02040503050406030204" pitchFamily="18" charset="0"/>
-                          </a:rPr>
-                          <m:t>−9.8</m:t>
-                        </m:r>
-                        <m:r>
-                          <a:rPr lang="en-US" altLang="ja-JP" sz="2400" i="1">
-                            <a:latin typeface="Cambria Math" panose="02040503050406030204" pitchFamily="18" charset="0"/>
-                          </a:rPr>
-                          <m:t>𝑚</m:t>
-                        </m:r>
-                        <m:r>
-                          <a:rPr lang="en-US" altLang="ja-JP" sz="2400" i="1">
-                            <a:latin typeface="Cambria Math" panose="02040503050406030204" pitchFamily="18" charset="0"/>
-                          </a:rPr>
-                          <m:t>/</m:t>
-                        </m:r>
-                        <m:sSup>
-                          <m:sSupPr>
-                            <m:ctrlPr>
-                              <a:rPr lang="en-US" altLang="ja-JP" sz="2400" i="1">
-                                <a:latin typeface="Cambria Math" panose="02040503050406030204" pitchFamily="18" charset="0"/>
-                              </a:rPr>
-                            </m:ctrlPr>
-                          </m:sSupPr>
-                          <m:e>
-                            <m:r>
-                              <a:rPr lang="ja-JP" altLang="en-US" sz="2400" i="1">
-                                <a:latin typeface="Cambria Math" panose="02040503050406030204" pitchFamily="18" charset="0"/>
-                              </a:rPr>
-                              <m:t>秒</m:t>
-                            </m:r>
-                          </m:e>
-                          <m:sup>
-                            <m:r>
-                              <a:rPr lang="en-US" altLang="ja-JP" sz="2400" i="1">
-                                <a:latin typeface="Cambria Math" panose="02040503050406030204" pitchFamily="18" charset="0"/>
-                              </a:rPr>
-                              <m:t>2</m:t>
-                            </m:r>
-                          </m:sup>
-                        </m:sSup>
-                      </m:e>
-                    </m:d>
-                    <m:sSup>
-                      <m:sSupPr>
-                        <m:ctrlPr>
-                          <a:rPr lang="en-US" altLang="ja-JP" sz="2400" b="0" i="1" smtClean="0">
-                            <a:latin typeface="Cambria Math" panose="02040503050406030204" pitchFamily="18" charset="0"/>
-                          </a:rPr>
-                        </m:ctrlPr>
-                      </m:sSupPr>
-                      <m:e>
-                        <m:r>
-                          <a:rPr lang="en-US" altLang="ja-JP" sz="2400" b="0" i="1" smtClean="0">
-                            <a:latin typeface="Cambria Math" panose="02040503050406030204" pitchFamily="18" charset="0"/>
-                          </a:rPr>
-                          <m:t>𝑡</m:t>
-                        </m:r>
-                      </m:e>
-                      <m:sup>
-                        <m:r>
-                          <a:rPr lang="en-US" altLang="ja-JP" sz="2400" b="0" i="1" smtClean="0">
-                            <a:latin typeface="Cambria Math" panose="02040503050406030204" pitchFamily="18" charset="0"/>
-                          </a:rPr>
-                          <m:t>2</m:t>
-                        </m:r>
-                      </m:sup>
-                    </m:sSup>
-                  </m:oMath>
-                </a14:m>
-                <a:r>
-                  <a:rPr lang="en-US" altLang="ja-JP" sz="2400" dirty="0"/>
-                  <a:t> </a:t>
-                </a:r>
-              </a:p>
-              <a:p>
-                <a14:m>
-                  <m:oMath xmlns:m="http://schemas.openxmlformats.org/officeDocument/2006/math">
-                    <m:r>
-                      <a:rPr lang="en-US" altLang="ja-JP" sz="2400" b="0" i="1" dirty="0" smtClean="0">
-                        <a:solidFill>
-                          <a:schemeClr val="tx1"/>
-                        </a:solidFill>
-                        <a:latin typeface="Cambria Math" panose="02040503050406030204" pitchFamily="18" charset="0"/>
-                      </a:rPr>
-                      <m:t>−50</m:t>
-                    </m:r>
-                    <m:r>
-                      <a:rPr lang="en-US" altLang="ja-JP" sz="2400" b="0" i="1" dirty="0" smtClean="0">
-                        <a:solidFill>
-                          <a:schemeClr val="tx1"/>
-                        </a:solidFill>
-                        <a:latin typeface="Cambria Math" panose="02040503050406030204" pitchFamily="18" charset="0"/>
-                      </a:rPr>
-                      <m:t>𝑚</m:t>
-                    </m:r>
-                    <m:r>
-                      <a:rPr lang="en-US" altLang="ja-JP" sz="2400" b="0" i="1" smtClean="0">
-                        <a:latin typeface="Cambria Math" panose="02040503050406030204" pitchFamily="18" charset="0"/>
-                      </a:rPr>
-                      <m:t>=</m:t>
-                    </m:r>
-                    <m:r>
-                      <a:rPr lang="en-US" altLang="ja-JP" sz="2400" i="1">
-                        <a:latin typeface="Cambria Math" panose="02040503050406030204" pitchFamily="18" charset="0"/>
-                      </a:rPr>
-                      <m:t>−4</m:t>
-                    </m:r>
-                    <m:r>
-                      <a:rPr lang="en-US" altLang="ja-JP" sz="2400" i="1">
-                        <a:latin typeface="Cambria Math" panose="02040503050406030204" pitchFamily="18" charset="0"/>
-                      </a:rPr>
-                      <m:t>.</m:t>
-                    </m:r>
-                    <m:r>
-                      <a:rPr lang="en-US" altLang="ja-JP" sz="2400" i="1">
-                        <a:latin typeface="Cambria Math" panose="02040503050406030204" pitchFamily="18" charset="0"/>
-                      </a:rPr>
-                      <m:t>9</m:t>
-                    </m:r>
-                    <m:r>
-                      <a:rPr lang="en-US" altLang="ja-JP" sz="2400" i="1">
-                        <a:latin typeface="Cambria Math" panose="02040503050406030204" pitchFamily="18" charset="0"/>
-                      </a:rPr>
-                      <m:t>𝑚</m:t>
-                    </m:r>
-                    <m:r>
-                      <a:rPr lang="en-US" altLang="ja-JP" sz="2400" i="1">
-                        <a:latin typeface="Cambria Math" panose="02040503050406030204" pitchFamily="18" charset="0"/>
-                      </a:rPr>
-                      <m:t>/</m:t>
-                    </m:r>
-                    <m:sSup>
-                      <m:sSupPr>
-                        <m:ctrlPr>
-                          <a:rPr lang="en-US" altLang="ja-JP" sz="2400" i="1">
-                            <a:latin typeface="Cambria Math" panose="02040503050406030204" pitchFamily="18" charset="0"/>
-                          </a:rPr>
-                        </m:ctrlPr>
-                      </m:sSupPr>
-                      <m:e>
-                        <m:r>
-                          <a:rPr lang="ja-JP" altLang="en-US" sz="2400" i="1">
-                            <a:latin typeface="Cambria Math" panose="02040503050406030204" pitchFamily="18" charset="0"/>
-                          </a:rPr>
-                          <m:t>秒</m:t>
-                        </m:r>
-                      </m:e>
-                      <m:sup>
-                        <m:r>
-                          <a:rPr lang="en-US" altLang="ja-JP" sz="2400" i="1">
-                            <a:latin typeface="Cambria Math" panose="02040503050406030204" pitchFamily="18" charset="0"/>
-                          </a:rPr>
-                          <m:t>2</m:t>
-                        </m:r>
-                      </m:sup>
-                    </m:sSup>
-                    <m:sSup>
-                      <m:sSupPr>
-                        <m:ctrlPr>
-                          <a:rPr lang="en-US" altLang="ja-JP" sz="2400" b="0" i="1" smtClean="0">
-                            <a:latin typeface="Cambria Math" panose="02040503050406030204" pitchFamily="18" charset="0"/>
-                          </a:rPr>
-                        </m:ctrlPr>
-                      </m:sSupPr>
-                      <m:e>
-                        <m:r>
-                          <a:rPr lang="en-US" altLang="ja-JP" sz="2400" b="0" i="1" smtClean="0">
-                            <a:latin typeface="Cambria Math" panose="02040503050406030204" pitchFamily="18" charset="0"/>
-                          </a:rPr>
-                          <m:t>𝑡</m:t>
-                        </m:r>
-                      </m:e>
-                      <m:sup>
-                        <m:r>
-                          <a:rPr lang="en-US" altLang="ja-JP" sz="2400" b="0" i="1" smtClean="0">
-                            <a:latin typeface="Cambria Math" panose="02040503050406030204" pitchFamily="18" charset="0"/>
-                          </a:rPr>
-                          <m:t>2</m:t>
-                        </m:r>
-                      </m:sup>
-                    </m:sSup>
-                  </m:oMath>
-                </a14:m>
-                <a:r>
-                  <a:rPr lang="en-US" altLang="ja-JP" sz="2400" dirty="0"/>
-                  <a:t> </a:t>
-                </a:r>
-              </a:p>
-              <a:p>
-                <a14:m>
-                  <m:oMath xmlns:m="http://schemas.openxmlformats.org/officeDocument/2006/math">
-                    <m:sSup>
-                      <m:sSupPr>
-                        <m:ctrlPr>
-                          <a:rPr lang="en-US" altLang="ja-JP" sz="2400" i="1">
-                            <a:latin typeface="Cambria Math" panose="02040503050406030204" pitchFamily="18" charset="0"/>
-                          </a:rPr>
-                        </m:ctrlPr>
-                      </m:sSupPr>
-                      <m:e>
-                        <m:r>
-                          <a:rPr lang="en-US" altLang="ja-JP" sz="2400" i="1">
-                            <a:latin typeface="Cambria Math" panose="02040503050406030204" pitchFamily="18" charset="0"/>
-                          </a:rPr>
-                          <m:t>𝑡</m:t>
-                        </m:r>
-                      </m:e>
-                      <m:sup>
-                        <m:r>
-                          <a:rPr lang="en-US" altLang="ja-JP" sz="2400" i="1">
-                            <a:latin typeface="Cambria Math" panose="02040503050406030204" pitchFamily="18" charset="0"/>
-                          </a:rPr>
-                          <m:t>2</m:t>
-                        </m:r>
-                      </m:sup>
-                    </m:sSup>
-                    <m:r>
-                      <a:rPr lang="en-US" altLang="ja-JP" sz="2400" b="0" i="1" smtClean="0">
-                        <a:latin typeface="Cambria Math" panose="02040503050406030204" pitchFamily="18" charset="0"/>
-                      </a:rPr>
-                      <m:t>=</m:t>
-                    </m:r>
-                    <m:r>
-                      <a:rPr lang="en-US" altLang="ja-JP" sz="2400" i="1" dirty="0" smtClean="0">
-                        <a:latin typeface="Cambria Math" panose="02040503050406030204" pitchFamily="18" charset="0"/>
-                      </a:rPr>
-                      <m:t>−50</m:t>
-                    </m:r>
-                    <m:r>
-                      <a:rPr lang="en-US" altLang="ja-JP" sz="2400" i="1" dirty="0" smtClean="0">
-                        <a:latin typeface="Cambria Math" panose="02040503050406030204" pitchFamily="18" charset="0"/>
-                      </a:rPr>
-                      <m:t>𝑚</m:t>
-                    </m:r>
-                    <m:r>
-                      <a:rPr lang="en-US" altLang="ja-JP" sz="2400" i="1">
-                        <a:latin typeface="Cambria Math" panose="02040503050406030204" pitchFamily="18" charset="0"/>
-                      </a:rPr>
-                      <m:t>÷</m:t>
-                    </m:r>
-                    <m:d>
-                      <m:dPr>
-                        <m:ctrlPr>
-                          <a:rPr lang="en-US" altLang="ja-JP" sz="2400" i="1">
-                            <a:latin typeface="Cambria Math" panose="02040503050406030204" pitchFamily="18" charset="0"/>
-                          </a:rPr>
-                        </m:ctrlPr>
-                      </m:dPr>
-                      <m:e>
-                        <m:r>
-                          <a:rPr lang="en-US" altLang="ja-JP" sz="2400" i="1">
-                            <a:latin typeface="Cambria Math" panose="02040503050406030204" pitchFamily="18" charset="0"/>
-                          </a:rPr>
-                          <m:t>−</m:t>
-                        </m:r>
-                        <m:f>
-                          <m:fPr>
-                            <m:ctrlPr>
-                              <a:rPr lang="en-US" altLang="ja-JP" sz="2400" i="1">
-                                <a:latin typeface="Cambria Math" panose="02040503050406030204" pitchFamily="18" charset="0"/>
-                              </a:rPr>
-                            </m:ctrlPr>
-                          </m:fPr>
-                          <m:num>
-                            <m:r>
-                              <a:rPr lang="en-US" altLang="ja-JP" sz="2400" i="1">
-                                <a:latin typeface="Cambria Math" panose="02040503050406030204" pitchFamily="18" charset="0"/>
-                              </a:rPr>
-                              <m:t>4.9</m:t>
-                            </m:r>
-                            <m:r>
-                              <a:rPr lang="en-US" altLang="ja-JP" sz="2400" i="1">
-                                <a:latin typeface="Cambria Math" panose="02040503050406030204" pitchFamily="18" charset="0"/>
-                              </a:rPr>
-                              <m:t>𝑚</m:t>
-                            </m:r>
-                          </m:num>
-                          <m:den>
-                            <m:sSup>
-                              <m:sSupPr>
-                                <m:ctrlPr>
-                                  <a:rPr lang="en-US" altLang="ja-JP" sz="2400" i="1">
-                                    <a:latin typeface="Cambria Math" panose="02040503050406030204" pitchFamily="18" charset="0"/>
-                                  </a:rPr>
-                                </m:ctrlPr>
-                              </m:sSupPr>
-                              <m:e>
-                                <m:r>
-                                  <a:rPr lang="ja-JP" altLang="en-US" sz="2400" i="1">
-                                    <a:latin typeface="Cambria Math" panose="02040503050406030204" pitchFamily="18" charset="0"/>
-                                  </a:rPr>
-                                  <m:t>秒</m:t>
-                                </m:r>
-                              </m:e>
-                              <m:sup>
-                                <m:r>
-                                  <a:rPr lang="en-US" altLang="ja-JP" sz="2400" i="1">
-                                    <a:latin typeface="Cambria Math" panose="02040503050406030204" pitchFamily="18" charset="0"/>
-                                  </a:rPr>
-                                  <m:t>2</m:t>
-                                </m:r>
-                              </m:sup>
-                            </m:sSup>
-                          </m:den>
-                        </m:f>
-                      </m:e>
-                    </m:d>
-                    <m:r>
-                      <a:rPr lang="en-US" altLang="ja-JP" sz="2400" b="0" i="1" dirty="0" smtClean="0">
-                        <a:latin typeface="Cambria Math" panose="02040503050406030204" pitchFamily="18" charset="0"/>
-                      </a:rPr>
-                      <m:t>=</m:t>
-                    </m:r>
-                    <m:r>
-                      <a:rPr lang="en-US" altLang="ja-JP" sz="2400" i="1" dirty="0">
-                        <a:latin typeface="Cambria Math" panose="02040503050406030204" pitchFamily="18" charset="0"/>
-                      </a:rPr>
-                      <m:t>−50</m:t>
-                    </m:r>
-                    <m:r>
-                      <a:rPr lang="en-US" altLang="ja-JP" sz="2400" i="1" dirty="0">
-                        <a:latin typeface="Cambria Math" panose="02040503050406030204" pitchFamily="18" charset="0"/>
-                      </a:rPr>
-                      <m:t>𝑚</m:t>
-                    </m:r>
-                    <m:r>
-                      <a:rPr lang="en-US" altLang="ja-JP" sz="2400" i="1" dirty="0" smtClean="0">
-                        <a:latin typeface="Cambria Math" panose="02040503050406030204" pitchFamily="18" charset="0"/>
-                      </a:rPr>
-                      <m:t>×</m:t>
-                    </m:r>
-                    <m:d>
-                      <m:dPr>
-                        <m:ctrlPr>
-                          <a:rPr lang="en-US" altLang="ja-JP" sz="2400" i="1">
-                            <a:latin typeface="Cambria Math" panose="02040503050406030204" pitchFamily="18" charset="0"/>
-                          </a:rPr>
-                        </m:ctrlPr>
-                      </m:dPr>
-                      <m:e>
-                        <m:r>
-                          <a:rPr lang="en-US" altLang="ja-JP" sz="2400" i="1">
-                            <a:latin typeface="Cambria Math" panose="02040503050406030204" pitchFamily="18" charset="0"/>
-                          </a:rPr>
-                          <m:t>−</m:t>
-                        </m:r>
-                        <m:f>
-                          <m:fPr>
-                            <m:ctrlPr>
-                              <a:rPr lang="en-US" altLang="ja-JP" sz="2400" i="1">
-                                <a:latin typeface="Cambria Math" panose="02040503050406030204" pitchFamily="18" charset="0"/>
-                              </a:rPr>
-                            </m:ctrlPr>
-                          </m:fPr>
-                          <m:num>
-                            <m:sSup>
-                              <m:sSupPr>
-                                <m:ctrlPr>
-                                  <a:rPr lang="en-US" altLang="ja-JP" sz="2400" i="1">
-                                    <a:latin typeface="Cambria Math" panose="02040503050406030204" pitchFamily="18" charset="0"/>
-                                  </a:rPr>
-                                </m:ctrlPr>
-                              </m:sSupPr>
-                              <m:e>
-                                <m:r>
-                                  <a:rPr lang="ja-JP" altLang="en-US" sz="2400" i="1">
-                                    <a:latin typeface="Cambria Math" panose="02040503050406030204" pitchFamily="18" charset="0"/>
-                                  </a:rPr>
-                                  <m:t>秒</m:t>
-                                </m:r>
-                              </m:e>
-                              <m:sup>
-                                <m:r>
-                                  <a:rPr lang="en-US" altLang="ja-JP" sz="2400" i="1">
-                                    <a:latin typeface="Cambria Math" panose="02040503050406030204" pitchFamily="18" charset="0"/>
-                                  </a:rPr>
-                                  <m:t>2</m:t>
-                                </m:r>
-                              </m:sup>
-                            </m:sSup>
-                          </m:num>
-                          <m:den>
-                            <m:r>
-                              <a:rPr lang="en-US" altLang="ja-JP" sz="2400" i="1">
-                                <a:latin typeface="Cambria Math" panose="02040503050406030204" pitchFamily="18" charset="0"/>
-                              </a:rPr>
-                              <m:t>4.9</m:t>
-                            </m:r>
-                            <m:r>
-                              <a:rPr lang="en-US" altLang="ja-JP" sz="2400" i="1">
-                                <a:latin typeface="Cambria Math" panose="02040503050406030204" pitchFamily="18" charset="0"/>
-                              </a:rPr>
-                              <m:t>𝑚</m:t>
-                            </m:r>
-                          </m:den>
-                        </m:f>
-                      </m:e>
-                    </m:d>
-                    <m:r>
-                      <a:rPr lang="en-US" altLang="ja-JP" sz="2400" b="0" i="1" dirty="0" smtClean="0">
-                        <a:latin typeface="Cambria Math" panose="02040503050406030204" pitchFamily="18" charset="0"/>
-                      </a:rPr>
-                      <m:t>=</m:t>
-                    </m:r>
-                    <m:f>
-                      <m:fPr>
-                        <m:ctrlPr>
-                          <a:rPr lang="en-US" altLang="ja-JP" sz="2400" i="1">
-                            <a:latin typeface="Cambria Math" panose="02040503050406030204" pitchFamily="18" charset="0"/>
-                          </a:rPr>
-                        </m:ctrlPr>
-                      </m:fPr>
-                      <m:num>
-                        <m:r>
-                          <a:rPr lang="en-US" altLang="ja-JP" sz="2400" b="0" i="1" smtClean="0">
-                            <a:latin typeface="Cambria Math" panose="02040503050406030204" pitchFamily="18" charset="0"/>
-                          </a:rPr>
-                          <m:t>50</m:t>
-                        </m:r>
-                      </m:num>
-                      <m:den>
-                        <m:r>
-                          <a:rPr lang="en-US" altLang="ja-JP" sz="2400" b="0" i="1" dirty="0" smtClean="0">
-                            <a:latin typeface="Cambria Math" panose="02040503050406030204" pitchFamily="18" charset="0"/>
-                          </a:rPr>
-                          <m:t>49</m:t>
-                        </m:r>
-                      </m:den>
-                    </m:f>
-                    <m:sSup>
-                      <m:sSupPr>
-                        <m:ctrlPr>
-                          <a:rPr lang="en-US" altLang="ja-JP" sz="2400" i="1">
-                            <a:latin typeface="Cambria Math" panose="02040503050406030204" pitchFamily="18" charset="0"/>
-                          </a:rPr>
-                        </m:ctrlPr>
-                      </m:sSupPr>
-                      <m:e>
-                        <m:r>
-                          <a:rPr lang="ja-JP" altLang="en-US" sz="2400" i="1">
-                            <a:latin typeface="Cambria Math" panose="02040503050406030204" pitchFamily="18" charset="0"/>
-                          </a:rPr>
-                          <m:t>秒</m:t>
-                        </m:r>
-                      </m:e>
-                      <m:sup>
-                        <m:r>
-                          <a:rPr lang="en-US" altLang="ja-JP" sz="2400" i="1">
-                            <a:latin typeface="Cambria Math" panose="02040503050406030204" pitchFamily="18" charset="0"/>
-                          </a:rPr>
-                          <m:t>2</m:t>
-                        </m:r>
-                      </m:sup>
-                    </m:sSup>
-                  </m:oMath>
-                </a14:m>
-                <a:r>
-                  <a:rPr lang="ja-JP" altLang="en-US" sz="2400" dirty="0"/>
-                  <a:t>　</a:t>
-                </a:r>
-                <a:endParaRPr lang="en-US" altLang="ja-JP" sz="2400" dirty="0"/>
-              </a:p>
-              <a:p>
-                <a14:m>
-                  <m:oMath xmlns:m="http://schemas.openxmlformats.org/officeDocument/2006/math">
-                    <m:r>
-                      <a:rPr lang="en-US" altLang="ja-JP" sz="2400" i="1" smtClean="0">
-                        <a:latin typeface="Cambria Math" panose="02040503050406030204" pitchFamily="18" charset="0"/>
-                      </a:rPr>
-                      <m:t>𝑡</m:t>
-                    </m:r>
-                    <m:r>
-                      <a:rPr lang="en-US" altLang="ja-JP" sz="2400" b="0" i="1" smtClean="0">
-                        <a:latin typeface="Cambria Math" panose="02040503050406030204" pitchFamily="18" charset="0"/>
-                      </a:rPr>
-                      <m:t>=</m:t>
-                    </m:r>
-                    <m:rad>
-                      <m:radPr>
-                        <m:degHide m:val="on"/>
-                        <m:ctrlPr>
-                          <a:rPr lang="en-US" altLang="ja-JP" sz="2400" b="0" i="1" smtClean="0">
-                            <a:solidFill>
-                              <a:srgbClr val="FF0000"/>
-                            </a:solidFill>
-                            <a:latin typeface="Cambria Math" panose="02040503050406030204" pitchFamily="18" charset="0"/>
-                          </a:rPr>
-                        </m:ctrlPr>
-                      </m:radPr>
-                      <m:deg/>
-                      <m:e>
-                        <m:f>
-                          <m:fPr>
-                            <m:ctrlPr>
-                              <a:rPr lang="en-US" altLang="ja-JP" sz="2400" i="1">
-                                <a:solidFill>
-                                  <a:srgbClr val="FF0000"/>
-                                </a:solidFill>
-                                <a:latin typeface="Cambria Math" panose="02040503050406030204" pitchFamily="18" charset="0"/>
-                              </a:rPr>
-                            </m:ctrlPr>
-                          </m:fPr>
-                          <m:num>
-                            <m:r>
-                              <a:rPr lang="en-US" altLang="ja-JP" sz="2400" i="1">
-                                <a:solidFill>
-                                  <a:srgbClr val="FF0000"/>
-                                </a:solidFill>
-                                <a:latin typeface="Cambria Math" panose="02040503050406030204" pitchFamily="18" charset="0"/>
-                              </a:rPr>
-                              <m:t>50</m:t>
-                            </m:r>
-                          </m:num>
-                          <m:den>
-                            <m:r>
-                              <a:rPr lang="en-US" altLang="ja-JP" sz="2400" i="1" dirty="0">
-                                <a:solidFill>
-                                  <a:srgbClr val="FF0000"/>
-                                </a:solidFill>
-                                <a:latin typeface="Cambria Math" panose="02040503050406030204" pitchFamily="18" charset="0"/>
-                              </a:rPr>
-                              <m:t>49</m:t>
-                            </m:r>
-                          </m:den>
-                        </m:f>
-                      </m:e>
-                    </m:rad>
-                    <m:r>
-                      <a:rPr lang="ja-JP" altLang="en-US" sz="2400" i="1">
-                        <a:solidFill>
-                          <a:srgbClr val="FF0000"/>
-                        </a:solidFill>
-                        <a:latin typeface="Cambria Math" panose="02040503050406030204" pitchFamily="18" charset="0"/>
-                      </a:rPr>
-                      <m:t>秒</m:t>
-                    </m:r>
-                  </m:oMath>
-                </a14:m>
-                <a:r>
-                  <a:rPr lang="en-US" altLang="ja-JP" sz="2400" dirty="0"/>
-                  <a:t> </a:t>
-                </a:r>
-              </a:p>
-            </p:txBody>
-          </p:sp>
-        </mc:Choice>
-        <mc:Fallback>
-          <p:sp>
-            <p:nvSpPr>
-              <p:cNvPr id="5" name="テキスト ボックス 4">
-                <a:extLst>
-                  <a:ext uri="{FF2B5EF4-FFF2-40B4-BE49-F238E27FC236}">
-                    <a16:creationId xmlns:a16="http://schemas.microsoft.com/office/drawing/2014/main" id="{B1AEA830-DE7C-46CA-B059-02154763F37C}"/>
-                  </a:ext>
-                </a:extLst>
-              </p:cNvPr>
-              <p:cNvSpPr txBox="1">
-                <a:spLocks noRot="1" noChangeAspect="1" noMove="1" noResize="1" noEditPoints="1" noAdjustHandles="1" noChangeArrowheads="1" noChangeShapeType="1" noTextEdit="1"/>
-              </p:cNvSpPr>
-              <p:nvPr/>
-            </p:nvSpPr>
-            <p:spPr>
-              <a:xfrm>
-                <a:off x="567542" y="1217490"/>
-                <a:ext cx="10948831" cy="3786806"/>
-              </a:xfrm>
-              <a:prstGeom prst="rect">
-                <a:avLst/>
-              </a:prstGeom>
-              <a:blipFill>
-                <a:blip r:embed="rId2"/>
-                <a:stretch>
-                  <a:fillRect l="-835" t="-1288"/>
-                </a:stretch>
-              </a:blipFill>
-            </p:spPr>
-            <p:txBody>
-              <a:bodyPr/>
-              <a:lstStyle/>
-              <a:p>
-                <a:r>
-                  <a:rPr lang="ja-JP" altLang="en-US">
-                    <a:noFill/>
-                  </a:rPr>
-                  <a:t> </a:t>
-                </a:r>
-              </a:p>
-            </p:txBody>
-          </p:sp>
-        </mc:Fallback>
-      </mc:AlternateContent>
-    </p:spTree>
-    <p:extLst>
-      <p:ext uri="{BB962C8B-B14F-4D97-AF65-F5344CB8AC3E}">
-        <p14:creationId xmlns:p14="http://schemas.microsoft.com/office/powerpoint/2010/main" val="717380680"/>
-      </p:ext>
-    </p:extLst>
-  </p:cSld>
-  <p:clrMapOvr>
-    <a:masterClrMapping/>
-  </p:clrMapOvr>
-</p:sld>
-</file>
-
-<file path=ppt/slides/slide11.xml><?xml version="1.0" encoding="utf-8"?>
-<p:sld xmlns:a="http://schemas.openxmlformats.org/drawingml/2006/main" xmlns:r="http://schemas.openxmlformats.org/officeDocument/2006/relationships" xmlns:p="http://schemas.openxmlformats.org/presentationml/2006/main">
-  <p:cSld>
-    <p:spTree>
-      <p:nvGrpSpPr>
-        <p:cNvPr id="1" name=""/>
-        <p:cNvGrpSpPr/>
-        <p:nvPr/>
-      </p:nvGrpSpPr>
-      <p:grpSpPr>
-        <a:xfrm>
-          <a:off x="0" y="0"/>
-          <a:ext cx="0" cy="0"/>
-          <a:chOff x="0" y="0"/>
-          <a:chExt cx="0" cy="0"/>
-        </a:xfrm>
-      </p:grpSpPr>
-      <p:sp>
-        <p:nvSpPr>
-          <p:cNvPr id="4" name="テキスト ボックス 3">
-            <a:extLst>
-              <a:ext uri="{FF2B5EF4-FFF2-40B4-BE49-F238E27FC236}">
-                <a16:creationId xmlns:a16="http://schemas.microsoft.com/office/drawing/2014/main" id="{5A13BF46-B8C5-48AA-8308-C9ECFF431A18}"/>
-              </a:ext>
-            </a:extLst>
-          </p:cNvPr>
-          <p:cNvSpPr txBox="1"/>
-          <p:nvPr/>
-        </p:nvSpPr>
-        <p:spPr>
-          <a:xfrm>
-            <a:off x="567542" y="491954"/>
-            <a:ext cx="3584636" cy="584775"/>
-          </a:xfrm>
-          <a:prstGeom prst="rect">
-            <a:avLst/>
-          </a:prstGeom>
-          <a:noFill/>
-        </p:spPr>
-        <p:txBody>
-          <a:bodyPr wrap="none" rtlCol="0">
-            <a:spAutoFit/>
-          </a:bodyPr>
-          <a:lstStyle/>
-          <a:p>
-            <a:r>
-              <a:rPr kumimoji="1" lang="ja-JP" altLang="en-US" sz="3200" b="1" u="sng" dirty="0"/>
-              <a:t>一次元の運動 例題</a:t>
-            </a:r>
-            <a:endParaRPr kumimoji="1" lang="en-US" altLang="ja-JP" sz="3200" b="1" u="sng" dirty="0"/>
-          </a:p>
-        </p:txBody>
-      </p:sp>
-      <mc:AlternateContent xmlns:mc="http://schemas.openxmlformats.org/markup-compatibility/2006">
-        <mc:Choice xmlns:a14="http://schemas.microsoft.com/office/drawing/2010/main" Requires="a14">
+      <mc:AlternateContent xmlns:mc="http://schemas.openxmlformats.org/markup-compatibility/2006" xmlns:a14="http://schemas.microsoft.com/office/drawing/2010/main">
+        <mc:Choice Requires="a14">
           <p:sp>
             <p:nvSpPr>
               <p:cNvPr id="5" name="テキスト ボックス 4">
@@ -4738,7 +3942,7 @@
             </p:txBody>
           </p:sp>
         </mc:Choice>
-        <mc:Fallback>
+        <mc:Fallback xmlns="">
           <p:sp>
             <p:nvSpPr>
               <p:cNvPr id="5" name="テキスト ボックス 4">
@@ -4783,8 +3987,8 @@
           </p:sp>
         </mc:Fallback>
       </mc:AlternateContent>
-      <mc:AlternateContent xmlns:mc="http://schemas.openxmlformats.org/markup-compatibility/2006">
-        <mc:Choice xmlns:a14="http://schemas.microsoft.com/office/drawing/2010/main" Requires="a14">
+      <mc:AlternateContent xmlns:mc="http://schemas.openxmlformats.org/markup-compatibility/2006" xmlns:a14="http://schemas.microsoft.com/office/drawing/2010/main">
+        <mc:Choice Requires="a14">
           <p:graphicFrame>
             <p:nvGraphicFramePr>
               <p:cNvPr id="6" name="表 2">
@@ -5110,7 +4314,7 @@
             </a:graphic>
           </p:graphicFrame>
         </mc:Choice>
-        <mc:Fallback>
+        <mc:Fallback xmlns="">
           <p:graphicFrame>
             <p:nvGraphicFramePr>
               <p:cNvPr id="6" name="表 2">
@@ -5305,8 +4509,8 @@
           </p:graphicFrame>
         </mc:Fallback>
       </mc:AlternateContent>
-      <mc:AlternateContent xmlns:mc="http://schemas.openxmlformats.org/markup-compatibility/2006">
-        <mc:Choice xmlns:a14="http://schemas.microsoft.com/office/drawing/2010/main" Requires="a14">
+      <mc:AlternateContent xmlns:mc="http://schemas.openxmlformats.org/markup-compatibility/2006" xmlns:a14="http://schemas.microsoft.com/office/drawing/2010/main">
+        <mc:Choice Requires="a14">
           <p:sp>
             <p:nvSpPr>
               <p:cNvPr id="7" name="テキスト ボックス 6">
@@ -5489,7 +4693,7 @@
             </p:txBody>
           </p:sp>
         </mc:Choice>
-        <mc:Fallback>
+        <mc:Fallback xmlns="">
           <p:sp>
             <p:nvSpPr>
               <p:cNvPr id="7" name="テキスト ボックス 6">
@@ -5547,7 +4751,7 @@
 </p:sld>
 </file>
 
-<file path=ppt/slides/slide12.xml><?xml version="1.0" encoding="utf-8"?>
+<file path=ppt/slides/slide11.xml><?xml version="1.0" encoding="utf-8"?>
 <p:sld xmlns:a="http://schemas.openxmlformats.org/drawingml/2006/main" xmlns:r="http://schemas.openxmlformats.org/officeDocument/2006/relationships" xmlns:p="http://schemas.openxmlformats.org/presentationml/2006/main">
   <p:cSld>
     <p:spTree>
@@ -5600,8 +4804,8 @@
           </a:p>
         </p:txBody>
       </p:sp>
-      <mc:AlternateContent xmlns:mc="http://schemas.openxmlformats.org/markup-compatibility/2006">
-        <mc:Choice xmlns:a14="http://schemas.microsoft.com/office/drawing/2010/main" Requires="a14">
+      <mc:AlternateContent xmlns:mc="http://schemas.openxmlformats.org/markup-compatibility/2006" xmlns:a14="http://schemas.microsoft.com/office/drawing/2010/main">
+        <mc:Choice Requires="a14">
           <p:sp>
             <p:nvSpPr>
               <p:cNvPr id="5" name="テキスト ボックス 4">
@@ -5812,13 +5016,7 @@
                       <a:rPr lang="en-US" altLang="ja-JP" sz="2400" b="0" i="1" smtClean="0">
                         <a:latin typeface="Cambria Math" panose="02040503050406030204" pitchFamily="18" charset="0"/>
                       </a:rPr>
-                      <m:t>= </m:t>
-                    </m:r>
-                    <m:r>
-                      <a:rPr lang="en-US" altLang="ja-JP" sz="2400" b="0" i="1" smtClean="0">
-                        <a:latin typeface="Cambria Math" panose="02040503050406030204" pitchFamily="18" charset="0"/>
-                      </a:rPr>
-                      <m:t>(−9.8</m:t>
+                      <m:t>= (−9.8</m:t>
                     </m:r>
                     <m:r>
                       <a:rPr lang="en-US" altLang="ja-JP" sz="2400" b="0" i="1" smtClean="0">
@@ -6152,7 +5350,7 @@
                       <a:rPr lang="ja-JP" altLang="en-US" sz="2400" i="1">
                         <a:latin typeface="Cambria Math" panose="02040503050406030204" pitchFamily="18" charset="0"/>
                       </a:rPr>
-                      <m:t>≒</m:t>
+                      <m:t>≒2.</m:t>
                     </m:r>
                     <m:r>
                       <a:rPr lang="en-US" altLang="ja-JP" sz="2400" b="0" i="1" smtClean="0">
@@ -6161,7 +5359,7 @@
                         </a:solidFill>
                         <a:latin typeface="Cambria Math" panose="02040503050406030204" pitchFamily="18" charset="0"/>
                       </a:rPr>
-                      <m:t>2.55</m:t>
+                      <m:t>55</m:t>
                     </m:r>
                     <m:r>
                       <a:rPr lang="ja-JP" altLang="en-US" sz="2400" i="1">
@@ -6182,7 +5380,7 @@
             </p:txBody>
           </p:sp>
         </mc:Choice>
-        <mc:Fallback>
+        <mc:Fallback xmlns="">
           <p:sp>
             <p:nvSpPr>
               <p:cNvPr id="5" name="テキスト ボックス 4">
@@ -6240,7 +5438,7 @@
 </p:sld>
 </file>
 
-<file path=ppt/slides/slide13.xml><?xml version="1.0" encoding="utf-8"?>
+<file path=ppt/slides/slide12.xml><?xml version="1.0" encoding="utf-8"?>
 <p:sld xmlns:a="http://schemas.openxmlformats.org/drawingml/2006/main" xmlns:r="http://schemas.openxmlformats.org/officeDocument/2006/relationships" xmlns:p="http://schemas.openxmlformats.org/presentationml/2006/main">
   <p:cSld>
     <p:spTree>
@@ -6293,8 +5491,8 @@
           </a:p>
         </p:txBody>
       </p:sp>
-      <mc:AlternateContent xmlns:mc="http://schemas.openxmlformats.org/markup-compatibility/2006">
-        <mc:Choice xmlns:a14="http://schemas.microsoft.com/office/drawing/2010/main" Requires="a14">
+      <mc:AlternateContent xmlns:mc="http://schemas.openxmlformats.org/markup-compatibility/2006" xmlns:a14="http://schemas.microsoft.com/office/drawing/2010/main">
+        <mc:Choice Requires="a14">
           <p:sp>
             <p:nvSpPr>
               <p:cNvPr id="5" name="テキスト ボックス 4">
@@ -6498,7 +5696,7 @@
             </p:txBody>
           </p:sp>
         </mc:Choice>
-        <mc:Fallback>
+        <mc:Fallback xmlns="">
           <p:sp>
             <p:nvSpPr>
               <p:cNvPr id="5" name="テキスト ボックス 4">
@@ -6609,8 +5807,8 @@
           </a:p>
         </p:txBody>
       </p:sp>
-      <mc:AlternateContent xmlns:mc="http://schemas.openxmlformats.org/markup-compatibility/2006">
-        <mc:Choice xmlns:a14="http://schemas.microsoft.com/office/drawing/2010/main" Requires="a14">
+      <mc:AlternateContent xmlns:mc="http://schemas.openxmlformats.org/markup-compatibility/2006" xmlns:a14="http://schemas.microsoft.com/office/drawing/2010/main">
+        <mc:Choice Requires="a14">
           <p:sp>
             <p:nvSpPr>
               <p:cNvPr id="6" name="テキスト ボックス 5">
@@ -6787,7 +5985,7 @@
             </p:txBody>
           </p:sp>
         </mc:Choice>
-        <mc:Fallback>
+        <mc:Fallback xmlns="">
           <p:sp>
             <p:nvSpPr>
               <p:cNvPr id="6" name="テキスト ボックス 5">
@@ -6832,8 +6030,8 @@
           </p:sp>
         </mc:Fallback>
       </mc:AlternateContent>
-      <mc:AlternateContent xmlns:mc="http://schemas.openxmlformats.org/markup-compatibility/2006">
-        <mc:Choice xmlns:a14="http://schemas.microsoft.com/office/drawing/2010/main" Requires="a14">
+      <mc:AlternateContent xmlns:mc="http://schemas.openxmlformats.org/markup-compatibility/2006" xmlns:a14="http://schemas.microsoft.com/office/drawing/2010/main">
+        <mc:Choice Requires="a14">
           <p:graphicFrame>
             <p:nvGraphicFramePr>
               <p:cNvPr id="2" name="表 2">
@@ -7171,7 +6369,7 @@
             </a:graphic>
           </p:graphicFrame>
         </mc:Choice>
-        <mc:Fallback>
+        <mc:Fallback xmlns="">
           <p:graphicFrame>
             <p:nvGraphicFramePr>
               <p:cNvPr id="2" name="表 2">
@@ -7432,8 +6630,8 @@
           </a:p>
         </p:txBody>
       </p:sp>
-      <mc:AlternateContent xmlns:mc="http://schemas.openxmlformats.org/markup-compatibility/2006">
-        <mc:Choice xmlns:a14="http://schemas.microsoft.com/office/drawing/2010/main" Requires="a14">
+      <mc:AlternateContent xmlns:mc="http://schemas.openxmlformats.org/markup-compatibility/2006" xmlns:a14="http://schemas.microsoft.com/office/drawing/2010/main">
+        <mc:Choice Requires="a14">
           <p:graphicFrame>
             <p:nvGraphicFramePr>
               <p:cNvPr id="2" name="表 2">
@@ -7780,7 +6978,7 @@
             </a:graphic>
           </p:graphicFrame>
         </mc:Choice>
-        <mc:Fallback>
+        <mc:Fallback xmlns="">
           <p:graphicFrame>
             <p:nvGraphicFramePr>
               <p:cNvPr id="2" name="表 2">
@@ -7975,8 +7173,8 @@
           </p:graphicFrame>
         </mc:Fallback>
       </mc:AlternateContent>
-      <mc:AlternateContent xmlns:mc="http://schemas.openxmlformats.org/markup-compatibility/2006">
-        <mc:Choice xmlns:a14="http://schemas.microsoft.com/office/drawing/2010/main" Requires="a14">
+      <mc:AlternateContent xmlns:mc="http://schemas.openxmlformats.org/markup-compatibility/2006" xmlns:a14="http://schemas.microsoft.com/office/drawing/2010/main">
+        <mc:Choice Requires="a14">
           <p:sp>
             <p:nvSpPr>
               <p:cNvPr id="5" name="テキスト ボックス 4">
@@ -8147,7 +7345,7 @@
             </p:txBody>
           </p:sp>
         </mc:Choice>
-        <mc:Fallback>
+        <mc:Fallback xmlns="">
           <p:sp>
             <p:nvSpPr>
               <p:cNvPr id="5" name="テキスト ボックス 4">
@@ -8192,8 +7390,8 @@
           </p:sp>
         </mc:Fallback>
       </mc:AlternateContent>
-      <mc:AlternateContent xmlns:mc="http://schemas.openxmlformats.org/markup-compatibility/2006">
-        <mc:Choice xmlns:a14="http://schemas.microsoft.com/office/drawing/2010/main" Requires="a14">
+      <mc:AlternateContent xmlns:mc="http://schemas.openxmlformats.org/markup-compatibility/2006" xmlns:a14="http://schemas.microsoft.com/office/drawing/2010/main">
+        <mc:Choice Requires="a14">
           <p:sp>
             <p:nvSpPr>
               <p:cNvPr id="7" name="テキスト ボックス 6">
@@ -8433,7 +7631,7 @@
             </p:txBody>
           </p:sp>
         </mc:Choice>
-        <mc:Fallback>
+        <mc:Fallback xmlns="">
           <p:sp>
             <p:nvSpPr>
               <p:cNvPr id="7" name="テキスト ボックス 6">
@@ -8544,8 +7742,8 @@
           </a:p>
         </p:txBody>
       </p:sp>
-      <mc:AlternateContent xmlns:mc="http://schemas.openxmlformats.org/markup-compatibility/2006">
-        <mc:Choice xmlns:a14="http://schemas.microsoft.com/office/drawing/2010/main" Requires="a14">
+      <mc:AlternateContent xmlns:mc="http://schemas.openxmlformats.org/markup-compatibility/2006" xmlns:a14="http://schemas.microsoft.com/office/drawing/2010/main">
+        <mc:Choice Requires="a14">
           <p:graphicFrame>
             <p:nvGraphicFramePr>
               <p:cNvPr id="2" name="表 2">
@@ -8886,7 +8084,7 @@
             </a:graphic>
           </p:graphicFrame>
         </mc:Choice>
-        <mc:Fallback>
+        <mc:Fallback xmlns="">
           <p:graphicFrame>
             <p:nvGraphicFramePr>
               <p:cNvPr id="2" name="表 2">
@@ -9075,8 +8273,8 @@
           </p:graphicFrame>
         </mc:Fallback>
       </mc:AlternateContent>
-      <mc:AlternateContent xmlns:mc="http://schemas.openxmlformats.org/markup-compatibility/2006">
-        <mc:Choice xmlns:a14="http://schemas.microsoft.com/office/drawing/2010/main" Requires="a14">
+      <mc:AlternateContent xmlns:mc="http://schemas.openxmlformats.org/markup-compatibility/2006" xmlns:a14="http://schemas.microsoft.com/office/drawing/2010/main">
+        <mc:Choice Requires="a14">
           <p:sp>
             <p:nvSpPr>
               <p:cNvPr id="5" name="テキスト ボックス 4">
@@ -9299,7 +8497,7 @@
             </p:txBody>
           </p:sp>
         </mc:Choice>
-        <mc:Fallback>
+        <mc:Fallback xmlns="">
           <p:sp>
             <p:nvSpPr>
               <p:cNvPr id="5" name="テキスト ボックス 4">
@@ -9344,8 +8542,8 @@
           </p:sp>
         </mc:Fallback>
       </mc:AlternateContent>
-      <mc:AlternateContent xmlns:mc="http://schemas.openxmlformats.org/markup-compatibility/2006">
-        <mc:Choice xmlns:a14="http://schemas.microsoft.com/office/drawing/2010/main" Requires="a14">
+      <mc:AlternateContent xmlns:mc="http://schemas.openxmlformats.org/markup-compatibility/2006" xmlns:a14="http://schemas.microsoft.com/office/drawing/2010/main">
+        <mc:Choice Requires="a14">
           <p:sp>
             <p:nvSpPr>
               <p:cNvPr id="7" name="テキスト ボックス 6">
@@ -9559,7 +8757,7 @@
             </p:txBody>
           </p:sp>
         </mc:Choice>
-        <mc:Fallback>
+        <mc:Fallback xmlns="">
           <p:sp>
             <p:nvSpPr>
               <p:cNvPr id="7" name="テキスト ボックス 6">
@@ -9670,8 +8868,8 @@
           </a:p>
         </p:txBody>
       </p:sp>
-      <mc:AlternateContent xmlns:mc="http://schemas.openxmlformats.org/markup-compatibility/2006">
-        <mc:Choice xmlns:a14="http://schemas.microsoft.com/office/drawing/2010/main" Requires="a14">
+      <mc:AlternateContent xmlns:mc="http://schemas.openxmlformats.org/markup-compatibility/2006" xmlns:a14="http://schemas.microsoft.com/office/drawing/2010/main">
+        <mc:Choice Requires="a14">
           <p:sp>
             <p:nvSpPr>
               <p:cNvPr id="5" name="テキスト ボックス 4">
@@ -10267,7 +9465,7 @@
             </p:txBody>
           </p:sp>
         </mc:Choice>
-        <mc:Fallback>
+        <mc:Fallback xmlns="">
           <p:sp>
             <p:nvSpPr>
               <p:cNvPr id="5" name="テキスト ボックス 4">
@@ -10378,716 +9576,8 @@
           </a:p>
         </p:txBody>
       </p:sp>
-      <mc:AlternateContent xmlns:mc="http://schemas.openxmlformats.org/markup-compatibility/2006">
-        <mc:Choice xmlns:a14="http://schemas.microsoft.com/office/drawing/2010/main" Requires="a14">
-          <p:sp>
-            <p:nvSpPr>
-              <p:cNvPr id="5" name="テキスト ボックス 4">
-                <a:extLst>
-                  <a:ext uri="{FF2B5EF4-FFF2-40B4-BE49-F238E27FC236}">
-                    <a16:creationId xmlns:a16="http://schemas.microsoft.com/office/drawing/2014/main" id="{B1AEA830-DE7C-46CA-B059-02154763F37C}"/>
-                  </a:ext>
-                </a:extLst>
-              </p:cNvPr>
-              <p:cNvSpPr txBox="1"/>
-              <p:nvPr/>
-            </p:nvSpPr>
-            <p:spPr>
-              <a:xfrm>
-                <a:off x="567542" y="1217490"/>
-                <a:ext cx="8557151" cy="4042582"/>
-              </a:xfrm>
-              <a:prstGeom prst="rect">
-                <a:avLst/>
-              </a:prstGeom>
-              <a:noFill/>
-            </p:spPr>
-            <p:txBody>
-              <a:bodyPr wrap="none" rtlCol="0">
-                <a:spAutoFit/>
-              </a:bodyPr>
-              <a:lstStyle/>
-              <a:p>
-                <a14:m>
-                  <m:oMath xmlns:m="http://schemas.openxmlformats.org/officeDocument/2006/math">
-                    <m:r>
-                      <a:rPr lang="ja-JP" altLang="en-US" sz="2400" i="1" dirty="0" smtClean="0">
-                        <a:latin typeface="Cambria Math" panose="02040503050406030204" pitchFamily="18" charset="0"/>
-                      </a:rPr>
-                      <m:t>時速</m:t>
-                    </m:r>
-                    <m:r>
-                      <a:rPr lang="en-US" altLang="ja-JP" sz="2400" i="1" dirty="0" smtClean="0">
-                        <a:latin typeface="Cambria Math" panose="02040503050406030204" pitchFamily="18" charset="0"/>
-                      </a:rPr>
-                      <m:t>50</m:t>
-                    </m:r>
-                    <m:r>
-                      <a:rPr lang="en-US" altLang="ja-JP" sz="2400" i="1" dirty="0" smtClean="0">
-                        <a:latin typeface="Cambria Math" panose="02040503050406030204" pitchFamily="18" charset="0"/>
-                      </a:rPr>
-                      <m:t>𝑘𝑚</m:t>
-                    </m:r>
-                    <m:r>
-                      <a:rPr lang="ja-JP" altLang="en-US" sz="2400" i="1" dirty="0" smtClean="0">
-                        <a:latin typeface="Cambria Math" panose="02040503050406030204" pitchFamily="18" charset="0"/>
-                      </a:rPr>
-                      <m:t>で走行する自動車がブレーキをかけて停止した。</m:t>
-                    </m:r>
-                  </m:oMath>
-                </a14:m>
-                <a:r>
-                  <a:rPr lang="en-US" altLang="ja-JP" sz="2400" dirty="0"/>
-                  <a:t> </a:t>
-                </a:r>
-              </a:p>
-              <a:p>
-                <a14:m>
-                  <m:oMath xmlns:m="http://schemas.openxmlformats.org/officeDocument/2006/math">
-                    <m:r>
-                      <a:rPr lang="ja-JP" altLang="en-US" sz="2400" i="1" dirty="0" smtClean="0">
-                        <a:latin typeface="Cambria Math" panose="02040503050406030204" pitchFamily="18" charset="0"/>
-                      </a:rPr>
-                      <m:t>ブレーキの加速度を</m:t>
-                    </m:r>
-                    <m:r>
-                      <a:rPr lang="en-US" altLang="ja-JP" sz="2400" i="1" dirty="0" smtClean="0">
-                        <a:latin typeface="Cambria Math" panose="02040503050406030204" pitchFamily="18" charset="0"/>
-                      </a:rPr>
-                      <m:t>−6.5</m:t>
-                    </m:r>
-                    <m:r>
-                      <a:rPr lang="en-US" altLang="ja-JP" sz="2400" i="1" dirty="0" smtClean="0">
-                        <a:latin typeface="Cambria Math" panose="02040503050406030204" pitchFamily="18" charset="0"/>
-                      </a:rPr>
-                      <m:t>𝑚</m:t>
-                    </m:r>
-                    <m:r>
-                      <a:rPr lang="en-US" altLang="ja-JP" sz="2400" i="1" dirty="0" smtClean="0">
-                        <a:latin typeface="Cambria Math" panose="02040503050406030204" pitchFamily="18" charset="0"/>
-                      </a:rPr>
-                      <m:t>/</m:t>
-                    </m:r>
-                    <m:sSup>
-                      <m:sSupPr>
-                        <m:ctrlPr>
-                          <a:rPr lang="en-US" altLang="ja-JP" sz="2400" i="1" dirty="0" smtClean="0">
-                            <a:latin typeface="Cambria Math" panose="02040503050406030204" pitchFamily="18" charset="0"/>
-                          </a:rPr>
-                        </m:ctrlPr>
-                      </m:sSupPr>
-                      <m:e>
-                        <m:r>
-                          <a:rPr lang="ja-JP" altLang="en-US" sz="2400" i="1" dirty="0">
-                            <a:latin typeface="Cambria Math" panose="02040503050406030204" pitchFamily="18" charset="0"/>
-                          </a:rPr>
-                          <m:t>秒</m:t>
-                        </m:r>
-                      </m:e>
-                      <m:sup>
-                        <m:r>
-                          <a:rPr lang="en-US" altLang="ja-JP" sz="2400" b="0" i="1" dirty="0" smtClean="0">
-                            <a:latin typeface="Cambria Math" panose="02040503050406030204" pitchFamily="18" charset="0"/>
-                          </a:rPr>
-                          <m:t>2</m:t>
-                        </m:r>
-                      </m:sup>
-                    </m:sSup>
-                    <m:r>
-                      <a:rPr lang="ja-JP" altLang="en-US" sz="2400" i="1" dirty="0" smtClean="0">
-                        <a:latin typeface="Cambria Math" panose="02040503050406030204" pitchFamily="18" charset="0"/>
-                      </a:rPr>
-                      <m:t>としたとき、</m:t>
-                    </m:r>
-                  </m:oMath>
-                </a14:m>
-                <a:r>
-                  <a:rPr lang="en-US" altLang="ja-JP" sz="2400" dirty="0"/>
-                  <a:t> </a:t>
-                </a:r>
-              </a:p>
-              <a:p>
-                <a14:m>
-                  <m:oMath xmlns:m="http://schemas.openxmlformats.org/officeDocument/2006/math">
-                    <m:r>
-                      <a:rPr lang="ja-JP" altLang="en-US" sz="2400" i="1" dirty="0" smtClean="0">
-                        <a:latin typeface="Cambria Math" panose="02040503050406030204" pitchFamily="18" charset="0"/>
-                      </a:rPr>
-                      <m:t>ブレーキをかけて停止するまでに何秒かかるか求めなさい。</m:t>
-                    </m:r>
-                  </m:oMath>
-                </a14:m>
-                <a:r>
-                  <a:rPr lang="en-US" altLang="ja-JP" sz="2400" dirty="0"/>
-                  <a:t> </a:t>
-                </a:r>
-              </a:p>
-              <a:p>
-                <a:endParaRPr lang="en-US" altLang="ja-JP" sz="2400" dirty="0"/>
-              </a:p>
-              <a:p>
-                <a:r>
-                  <a:rPr lang="ja-JP" altLang="en-US" sz="2400" b="1" dirty="0">
-                    <a:solidFill>
-                      <a:srgbClr val="FF0000"/>
-                    </a:solidFill>
-                  </a:rPr>
-                  <a:t>■解答</a:t>
-                </a:r>
-                <a:endParaRPr lang="en-US" altLang="ja-JP" sz="2400" b="1" dirty="0">
-                  <a:solidFill>
-                    <a:srgbClr val="FF0000"/>
-                  </a:solidFill>
-                </a:endParaRPr>
-              </a:p>
-              <a:p>
-                <a14:m>
-                  <m:oMath xmlns:m="http://schemas.openxmlformats.org/officeDocument/2006/math">
-                    <m:r>
-                      <a:rPr lang="en-US" altLang="ja-JP" sz="2400" b="0" i="1" smtClean="0">
-                        <a:solidFill>
-                          <a:schemeClr val="tx1"/>
-                        </a:solidFill>
-                        <a:latin typeface="Cambria Math" panose="02040503050406030204" pitchFamily="18" charset="0"/>
-                      </a:rPr>
-                      <m:t>0=13.8</m:t>
-                    </m:r>
-                    <m:r>
-                      <a:rPr lang="en-US" altLang="ja-JP" sz="2400" b="0" i="1" smtClean="0">
-                        <a:solidFill>
-                          <a:schemeClr val="tx1"/>
-                        </a:solidFill>
-                        <a:latin typeface="Cambria Math" panose="02040503050406030204" pitchFamily="18" charset="0"/>
-                      </a:rPr>
-                      <m:t>𝑚</m:t>
-                    </m:r>
-                    <m:r>
-                      <a:rPr lang="en-US" altLang="ja-JP" sz="2400" b="0" i="1" smtClean="0">
-                        <a:solidFill>
-                          <a:schemeClr val="tx1"/>
-                        </a:solidFill>
-                        <a:latin typeface="Cambria Math" panose="02040503050406030204" pitchFamily="18" charset="0"/>
-                      </a:rPr>
-                      <m:t>/</m:t>
-                    </m:r>
-                    <m:r>
-                      <a:rPr lang="ja-JP" altLang="en-US" sz="2400" i="1">
-                        <a:latin typeface="Cambria Math" panose="02040503050406030204" pitchFamily="18" charset="0"/>
-                      </a:rPr>
-                      <m:t>秒</m:t>
-                    </m:r>
-                    <m:r>
-                      <a:rPr lang="en-US" altLang="ja-JP" sz="2400" b="0" i="1" smtClean="0">
-                        <a:solidFill>
-                          <a:schemeClr val="tx1"/>
-                        </a:solidFill>
-                        <a:latin typeface="Cambria Math" panose="02040503050406030204" pitchFamily="18" charset="0"/>
-                      </a:rPr>
-                      <m:t>+(−6.5</m:t>
-                    </m:r>
-                    <m:r>
-                      <a:rPr lang="en-US" altLang="ja-JP" sz="2400" b="0" i="1" smtClean="0">
-                        <a:solidFill>
-                          <a:schemeClr val="tx1"/>
-                        </a:solidFill>
-                        <a:latin typeface="Cambria Math" panose="02040503050406030204" pitchFamily="18" charset="0"/>
-                      </a:rPr>
-                      <m:t>𝑚</m:t>
-                    </m:r>
-                    <m:r>
-                      <a:rPr lang="en-US" altLang="ja-JP" sz="2400" b="0" i="1" smtClean="0">
-                        <a:solidFill>
-                          <a:schemeClr val="tx1"/>
-                        </a:solidFill>
-                        <a:latin typeface="Cambria Math" panose="02040503050406030204" pitchFamily="18" charset="0"/>
-                      </a:rPr>
-                      <m:t>/</m:t>
-                    </m:r>
-                    <m:sSup>
-                      <m:sSupPr>
-                        <m:ctrlPr>
-                          <a:rPr lang="en-US" altLang="ja-JP" sz="2400" b="0" i="1" smtClean="0">
-                            <a:solidFill>
-                              <a:schemeClr val="tx1"/>
-                            </a:solidFill>
-                            <a:latin typeface="Cambria Math" panose="02040503050406030204" pitchFamily="18" charset="0"/>
-                          </a:rPr>
-                        </m:ctrlPr>
-                      </m:sSupPr>
-                      <m:e>
-                        <m:r>
-                          <a:rPr lang="ja-JP" altLang="en-US" sz="2400" i="1">
-                            <a:latin typeface="Cambria Math" panose="02040503050406030204" pitchFamily="18" charset="0"/>
-                          </a:rPr>
-                          <m:t>秒</m:t>
-                        </m:r>
-                      </m:e>
-                      <m:sup>
-                        <m:r>
-                          <a:rPr lang="en-US" altLang="ja-JP" sz="2400" i="1">
-                            <a:latin typeface="Cambria Math" panose="02040503050406030204" pitchFamily="18" charset="0"/>
-                          </a:rPr>
-                          <m:t>2</m:t>
-                        </m:r>
-                      </m:sup>
-                    </m:sSup>
-                    <m:r>
-                      <a:rPr lang="en-US" altLang="ja-JP" sz="2400" b="0" i="1" smtClean="0">
-                        <a:solidFill>
-                          <a:schemeClr val="tx1"/>
-                        </a:solidFill>
-                        <a:latin typeface="Cambria Math" panose="02040503050406030204" pitchFamily="18" charset="0"/>
-                      </a:rPr>
-                      <m:t>)</m:t>
-                    </m:r>
-                    <m:r>
-                      <a:rPr lang="en-US" altLang="ja-JP" sz="2400" b="0" i="1" smtClean="0">
-                        <a:solidFill>
-                          <a:schemeClr val="tx1"/>
-                        </a:solidFill>
-                        <a:latin typeface="Cambria Math" panose="02040503050406030204" pitchFamily="18" charset="0"/>
-                      </a:rPr>
-                      <m:t>𝑡</m:t>
-                    </m:r>
-                  </m:oMath>
-                </a14:m>
-                <a:r>
-                  <a:rPr lang="en-US" altLang="ja-JP" sz="2400" dirty="0"/>
-                  <a:t> </a:t>
-                </a:r>
-              </a:p>
-              <a:p>
-                <a14:m>
-                  <m:oMath xmlns:m="http://schemas.openxmlformats.org/officeDocument/2006/math">
-                    <m:r>
-                      <a:rPr lang="en-US" altLang="ja-JP" sz="2400" b="0" i="1" smtClean="0">
-                        <a:latin typeface="Cambria Math" panose="02040503050406030204" pitchFamily="18" charset="0"/>
-                      </a:rPr>
-                      <m:t>𝑡</m:t>
-                    </m:r>
-                    <m:r>
-                      <a:rPr lang="en-US" altLang="ja-JP" sz="2400" b="0" i="1" smtClean="0">
-                        <a:latin typeface="Cambria Math" panose="02040503050406030204" pitchFamily="18" charset="0"/>
-                      </a:rPr>
-                      <m:t>=−</m:t>
-                    </m:r>
-                    <m:f>
-                      <m:fPr>
-                        <m:ctrlPr>
-                          <a:rPr lang="en-US" altLang="ja-JP" sz="2400" i="1">
-                            <a:latin typeface="Cambria Math" panose="02040503050406030204" pitchFamily="18" charset="0"/>
-                          </a:rPr>
-                        </m:ctrlPr>
-                      </m:fPr>
-                      <m:num>
-                        <m:r>
-                          <a:rPr lang="en-US" altLang="ja-JP" sz="2400" i="1">
-                            <a:latin typeface="Cambria Math" panose="02040503050406030204" pitchFamily="18" charset="0"/>
-                          </a:rPr>
-                          <m:t>13.8</m:t>
-                        </m:r>
-                        <m:r>
-                          <a:rPr lang="en-US" altLang="ja-JP" sz="2400" i="1">
-                            <a:latin typeface="Cambria Math" panose="02040503050406030204" pitchFamily="18" charset="0"/>
-                          </a:rPr>
-                          <m:t>𝑚</m:t>
-                        </m:r>
-                      </m:num>
-                      <m:den>
-                        <m:r>
-                          <a:rPr lang="ja-JP" altLang="en-US" sz="2400" i="1">
-                            <a:latin typeface="Cambria Math" panose="02040503050406030204" pitchFamily="18" charset="0"/>
-                          </a:rPr>
-                          <m:t>秒</m:t>
-                        </m:r>
-                      </m:den>
-                    </m:f>
-                    <m:r>
-                      <a:rPr lang="en-US" altLang="ja-JP" sz="2400" i="1">
-                        <a:latin typeface="Cambria Math" panose="02040503050406030204" pitchFamily="18" charset="0"/>
-                      </a:rPr>
-                      <m:t>÷</m:t>
-                    </m:r>
-                    <m:d>
-                      <m:dPr>
-                        <m:ctrlPr>
-                          <a:rPr lang="en-US" altLang="ja-JP" sz="2400" i="1" smtClean="0">
-                            <a:latin typeface="Cambria Math" panose="02040503050406030204" pitchFamily="18" charset="0"/>
-                          </a:rPr>
-                        </m:ctrlPr>
-                      </m:dPr>
-                      <m:e>
-                        <m:r>
-                          <a:rPr lang="en-US" altLang="ja-JP" sz="2400" b="0" i="1" smtClean="0">
-                            <a:latin typeface="Cambria Math" panose="02040503050406030204" pitchFamily="18" charset="0"/>
-                          </a:rPr>
-                          <m:t>−</m:t>
-                        </m:r>
-                        <m:f>
-                          <m:fPr>
-                            <m:ctrlPr>
-                              <a:rPr lang="en-US" altLang="ja-JP" sz="2400" i="1">
-                                <a:latin typeface="Cambria Math" panose="02040503050406030204" pitchFamily="18" charset="0"/>
-                              </a:rPr>
-                            </m:ctrlPr>
-                          </m:fPr>
-                          <m:num>
-                            <m:r>
-                              <a:rPr lang="en-US" altLang="ja-JP" sz="2400" i="1">
-                                <a:latin typeface="Cambria Math" panose="02040503050406030204" pitchFamily="18" charset="0"/>
-                              </a:rPr>
-                              <m:t>6.5</m:t>
-                            </m:r>
-                            <m:r>
-                              <a:rPr lang="en-US" altLang="ja-JP" sz="2400" i="1">
-                                <a:latin typeface="Cambria Math" panose="02040503050406030204" pitchFamily="18" charset="0"/>
-                              </a:rPr>
-                              <m:t>𝑚</m:t>
-                            </m:r>
-                          </m:num>
-                          <m:den>
-                            <m:sSup>
-                              <m:sSupPr>
-                                <m:ctrlPr>
-                                  <a:rPr lang="en-US" altLang="ja-JP" sz="2400" i="1">
-                                    <a:latin typeface="Cambria Math" panose="02040503050406030204" pitchFamily="18" charset="0"/>
-                                  </a:rPr>
-                                </m:ctrlPr>
-                              </m:sSupPr>
-                              <m:e>
-                                <m:r>
-                                  <a:rPr lang="ja-JP" altLang="en-US" sz="2400" i="1">
-                                    <a:latin typeface="Cambria Math" panose="02040503050406030204" pitchFamily="18" charset="0"/>
-                                  </a:rPr>
-                                  <m:t>秒</m:t>
-                                </m:r>
-                              </m:e>
-                              <m:sup>
-                                <m:r>
-                                  <a:rPr lang="en-US" altLang="ja-JP" sz="2400" i="1">
-                                    <a:latin typeface="Cambria Math" panose="02040503050406030204" pitchFamily="18" charset="0"/>
-                                  </a:rPr>
-                                  <m:t>2</m:t>
-                                </m:r>
-                              </m:sup>
-                            </m:sSup>
-                          </m:den>
-                        </m:f>
-                      </m:e>
-                    </m:d>
-                    <m:r>
-                      <a:rPr lang="en-US" altLang="ja-JP" sz="2400" b="0" i="1" smtClean="0">
-                        <a:solidFill>
-                          <a:schemeClr val="tx1"/>
-                        </a:solidFill>
-                        <a:latin typeface="Cambria Math" panose="02040503050406030204" pitchFamily="18" charset="0"/>
-                      </a:rPr>
-                      <m:t>=</m:t>
-                    </m:r>
-                    <m:r>
-                      <a:rPr lang="en-US" altLang="ja-JP" sz="2400" i="1">
-                        <a:latin typeface="Cambria Math" panose="02040503050406030204" pitchFamily="18" charset="0"/>
-                      </a:rPr>
-                      <m:t>−</m:t>
-                    </m:r>
-                    <m:f>
-                      <m:fPr>
-                        <m:ctrlPr>
-                          <a:rPr lang="en-US" altLang="ja-JP" sz="2400" i="1">
-                            <a:latin typeface="Cambria Math" panose="02040503050406030204" pitchFamily="18" charset="0"/>
-                          </a:rPr>
-                        </m:ctrlPr>
-                      </m:fPr>
-                      <m:num>
-                        <m:r>
-                          <a:rPr lang="en-US" altLang="ja-JP" sz="2400" i="1">
-                            <a:latin typeface="Cambria Math" panose="02040503050406030204" pitchFamily="18" charset="0"/>
-                          </a:rPr>
-                          <m:t>13.8</m:t>
-                        </m:r>
-                        <m:r>
-                          <a:rPr lang="en-US" altLang="ja-JP" sz="2400" i="1">
-                            <a:latin typeface="Cambria Math" panose="02040503050406030204" pitchFamily="18" charset="0"/>
-                          </a:rPr>
-                          <m:t>𝑚</m:t>
-                        </m:r>
-                      </m:num>
-                      <m:den>
-                        <m:r>
-                          <a:rPr lang="ja-JP" altLang="en-US" sz="2400" i="1">
-                            <a:latin typeface="Cambria Math" panose="02040503050406030204" pitchFamily="18" charset="0"/>
-                          </a:rPr>
-                          <m:t>秒</m:t>
-                        </m:r>
-                      </m:den>
-                    </m:f>
-                    <m:r>
-                      <a:rPr lang="en-US" altLang="ja-JP" sz="2400" i="1">
-                        <a:latin typeface="Cambria Math" panose="02040503050406030204" pitchFamily="18" charset="0"/>
-                      </a:rPr>
-                      <m:t>×</m:t>
-                    </m:r>
-                    <m:d>
-                      <m:dPr>
-                        <m:ctrlPr>
-                          <a:rPr lang="en-US" altLang="ja-JP" sz="2400" i="1">
-                            <a:latin typeface="Cambria Math" panose="02040503050406030204" pitchFamily="18" charset="0"/>
-                          </a:rPr>
-                        </m:ctrlPr>
-                      </m:dPr>
-                      <m:e>
-                        <m:r>
-                          <a:rPr lang="en-US" altLang="ja-JP" sz="2400" b="0" i="1" smtClean="0">
-                            <a:latin typeface="Cambria Math" panose="02040503050406030204" pitchFamily="18" charset="0"/>
-                          </a:rPr>
-                          <m:t>−</m:t>
-                        </m:r>
-                        <m:f>
-                          <m:fPr>
-                            <m:ctrlPr>
-                              <a:rPr lang="en-US" altLang="ja-JP" sz="2400" i="1">
-                                <a:latin typeface="Cambria Math" panose="02040503050406030204" pitchFamily="18" charset="0"/>
-                              </a:rPr>
-                            </m:ctrlPr>
-                          </m:fPr>
-                          <m:num>
-                            <m:sSup>
-                              <m:sSupPr>
-                                <m:ctrlPr>
-                                  <a:rPr lang="en-US" altLang="ja-JP" sz="2400" i="1">
-                                    <a:latin typeface="Cambria Math" panose="02040503050406030204" pitchFamily="18" charset="0"/>
-                                  </a:rPr>
-                                </m:ctrlPr>
-                              </m:sSupPr>
-                              <m:e>
-                                <m:r>
-                                  <a:rPr lang="ja-JP" altLang="en-US" sz="2400" i="1">
-                                    <a:latin typeface="Cambria Math" panose="02040503050406030204" pitchFamily="18" charset="0"/>
-                                  </a:rPr>
-                                  <m:t>秒</m:t>
-                                </m:r>
-                              </m:e>
-                              <m:sup>
-                                <m:r>
-                                  <a:rPr lang="en-US" altLang="ja-JP" sz="2400" i="1">
-                                    <a:latin typeface="Cambria Math" panose="02040503050406030204" pitchFamily="18" charset="0"/>
-                                  </a:rPr>
-                                  <m:t>2</m:t>
-                                </m:r>
-                              </m:sup>
-                            </m:sSup>
-                          </m:num>
-                          <m:den>
-                            <m:r>
-                              <a:rPr lang="en-US" altLang="ja-JP" sz="2400" i="1">
-                                <a:latin typeface="Cambria Math" panose="02040503050406030204" pitchFamily="18" charset="0"/>
-                              </a:rPr>
-                              <m:t>6.5</m:t>
-                            </m:r>
-                            <m:r>
-                              <a:rPr lang="en-US" altLang="ja-JP" sz="2400" i="1">
-                                <a:latin typeface="Cambria Math" panose="02040503050406030204" pitchFamily="18" charset="0"/>
-                              </a:rPr>
-                              <m:t>𝑚</m:t>
-                            </m:r>
-                          </m:den>
-                        </m:f>
-                      </m:e>
-                    </m:d>
-                    <m:r>
-                      <a:rPr lang="en-US" altLang="ja-JP" sz="2400" b="0" i="1" smtClean="0">
-                        <a:latin typeface="Cambria Math" panose="02040503050406030204" pitchFamily="18" charset="0"/>
-                      </a:rPr>
-                      <m:t>=</m:t>
-                    </m:r>
-                    <m:f>
-                      <m:fPr>
-                        <m:ctrlPr>
-                          <a:rPr lang="en-US" altLang="ja-JP" sz="2400" i="1" smtClean="0">
-                            <a:solidFill>
-                              <a:srgbClr val="FF0000"/>
-                            </a:solidFill>
-                            <a:latin typeface="Cambria Math" panose="02040503050406030204" pitchFamily="18" charset="0"/>
-                          </a:rPr>
-                        </m:ctrlPr>
-                      </m:fPr>
-                      <m:num>
-                        <m:r>
-                          <a:rPr lang="en-US" altLang="ja-JP" sz="2400" i="1">
-                            <a:solidFill>
-                              <a:srgbClr val="FF0000"/>
-                            </a:solidFill>
-                            <a:latin typeface="Cambria Math" panose="02040503050406030204" pitchFamily="18" charset="0"/>
-                          </a:rPr>
-                          <m:t>13.8</m:t>
-                        </m:r>
-                      </m:num>
-                      <m:den>
-                        <m:r>
-                          <a:rPr lang="en-US" altLang="ja-JP" sz="2400" b="0" i="1" smtClean="0">
-                            <a:solidFill>
-                              <a:srgbClr val="FF0000"/>
-                            </a:solidFill>
-                            <a:latin typeface="Cambria Math" panose="02040503050406030204" pitchFamily="18" charset="0"/>
-                          </a:rPr>
-                          <m:t>6.5</m:t>
-                        </m:r>
-                      </m:den>
-                    </m:f>
-                  </m:oMath>
-                </a14:m>
-                <a:r>
-                  <a:rPr lang="ja-JP" altLang="en-US" sz="2400" b="0" dirty="0">
-                    <a:solidFill>
-                      <a:srgbClr val="FF0000"/>
-                    </a:solidFill>
-                  </a:rPr>
-                  <a:t>秒</a:t>
-                </a:r>
-                <a:endParaRPr lang="en-US" altLang="ja-JP" sz="2400" b="0" dirty="0">
-                  <a:solidFill>
-                    <a:srgbClr val="FF0000"/>
-                  </a:solidFill>
-                </a:endParaRPr>
-              </a:p>
-              <a:p>
-                <a:endParaRPr lang="en-US" altLang="ja-JP" sz="2400" dirty="0">
-                  <a:solidFill>
-                    <a:srgbClr val="FF0000"/>
-                  </a:solidFill>
-                </a:endParaRPr>
-              </a:p>
-              <a:p>
-                <a:r>
-                  <a:rPr lang="ja-JP" altLang="en-US" sz="2400" b="0" dirty="0">
-                    <a:solidFill>
-                      <a:schemeClr val="tx1"/>
-                    </a:solidFill>
-                  </a:rPr>
-                  <a:t>計算が間違っていなければ、単位もぴったり合います。</a:t>
-                </a:r>
-                <a:endParaRPr lang="en-US" altLang="ja-JP" sz="2400" b="0" dirty="0">
-                  <a:solidFill>
-                    <a:schemeClr val="tx1"/>
-                  </a:solidFill>
-                </a:endParaRPr>
-              </a:p>
-            </p:txBody>
-          </p:sp>
-        </mc:Choice>
-        <mc:Fallback>
-          <p:sp>
-            <p:nvSpPr>
-              <p:cNvPr id="5" name="テキスト ボックス 4">
-                <a:extLst>
-                  <a:ext uri="{FF2B5EF4-FFF2-40B4-BE49-F238E27FC236}">
-                    <a16:creationId xmlns:a16="http://schemas.microsoft.com/office/drawing/2014/main" id="{B1AEA830-DE7C-46CA-B059-02154763F37C}"/>
-                  </a:ext>
-                </a:extLst>
-              </p:cNvPr>
-              <p:cNvSpPr txBox="1">
-                <a:spLocks noRot="1" noChangeAspect="1" noMove="1" noResize="1" noEditPoints="1" noAdjustHandles="1" noChangeArrowheads="1" noChangeShapeType="1" noTextEdit="1"/>
-              </p:cNvSpPr>
-              <p:nvPr/>
-            </p:nvSpPr>
-            <p:spPr>
-              <a:xfrm>
-                <a:off x="567542" y="1217490"/>
-                <a:ext cx="8557151" cy="4042582"/>
-              </a:xfrm>
-              <a:prstGeom prst="rect">
-                <a:avLst/>
-              </a:prstGeom>
-              <a:blipFill>
-                <a:blip r:embed="rId2"/>
-                <a:stretch>
-                  <a:fillRect l="-1068" b="-2564"/>
-                </a:stretch>
-              </a:blipFill>
-            </p:spPr>
-            <p:txBody>
-              <a:bodyPr/>
-              <a:lstStyle/>
-              <a:p>
-                <a:r>
-                  <a:rPr lang="ja-JP" altLang="en-US">
-                    <a:noFill/>
-                  </a:rPr>
-                  <a:t> </a:t>
-                </a:r>
-              </a:p>
-            </p:txBody>
-          </p:sp>
-        </mc:Fallback>
-      </mc:AlternateContent>
-    </p:spTree>
-    <p:extLst>
-      <p:ext uri="{BB962C8B-B14F-4D97-AF65-F5344CB8AC3E}">
-        <p14:creationId xmlns:p14="http://schemas.microsoft.com/office/powerpoint/2010/main" val="3808394766"/>
-      </p:ext>
-    </p:extLst>
-  </p:cSld>
-  <p:clrMapOvr>
-    <a:masterClrMapping/>
-  </p:clrMapOvr>
-</p:sld>
-</file>
-
-<file path=ppt/slides/slide7.xml><?xml version="1.0" encoding="utf-8"?>
-<p:sld xmlns:a="http://schemas.openxmlformats.org/drawingml/2006/main" xmlns:r="http://schemas.openxmlformats.org/officeDocument/2006/relationships" xmlns:p="http://schemas.openxmlformats.org/presentationml/2006/main">
-  <p:cSld>
-    <p:spTree>
-      <p:nvGrpSpPr>
-        <p:cNvPr id="1" name=""/>
-        <p:cNvGrpSpPr/>
-        <p:nvPr/>
-      </p:nvGrpSpPr>
-      <p:grpSpPr>
-        <a:xfrm>
-          <a:off x="0" y="0"/>
-          <a:ext cx="0" cy="0"/>
-          <a:chOff x="0" y="0"/>
-          <a:chExt cx="0" cy="0"/>
-        </a:xfrm>
-      </p:grpSpPr>
-      <p:sp>
-        <p:nvSpPr>
-          <p:cNvPr id="4" name="テキスト ボックス 3">
-            <a:extLst>
-              <a:ext uri="{FF2B5EF4-FFF2-40B4-BE49-F238E27FC236}">
-                <a16:creationId xmlns:a16="http://schemas.microsoft.com/office/drawing/2014/main" id="{5A13BF46-B8C5-48AA-8308-C9ECFF431A18}"/>
-              </a:ext>
-            </a:extLst>
-          </p:cNvPr>
-          <p:cNvSpPr txBox="1"/>
-          <p:nvPr/>
-        </p:nvSpPr>
-        <p:spPr>
-          <a:xfrm>
-            <a:off x="567542" y="491954"/>
-            <a:ext cx="3584636" cy="584775"/>
-          </a:xfrm>
-          <a:prstGeom prst="rect">
-            <a:avLst/>
-          </a:prstGeom>
-          <a:noFill/>
-        </p:spPr>
-        <p:txBody>
-          <a:bodyPr wrap="none" rtlCol="0">
-            <a:spAutoFit/>
-          </a:bodyPr>
-          <a:lstStyle/>
-          <a:p>
-            <a:r>
-              <a:rPr kumimoji="1" lang="ja-JP" altLang="en-US" sz="3200" b="1" u="sng" dirty="0"/>
-              <a:t>一次元の運動 例題</a:t>
-            </a:r>
-            <a:endParaRPr kumimoji="1" lang="en-US" altLang="ja-JP" sz="3200" b="1" u="sng" dirty="0"/>
-          </a:p>
-        </p:txBody>
-      </p:sp>
-      <mc:AlternateContent xmlns:mc="http://schemas.openxmlformats.org/markup-compatibility/2006">
-        <mc:Choice xmlns:a14="http://schemas.microsoft.com/office/drawing/2010/main" Requires="a14">
+      <mc:AlternateContent xmlns:mc="http://schemas.openxmlformats.org/markup-compatibility/2006" xmlns:a14="http://schemas.microsoft.com/office/drawing/2010/main">
+        <mc:Choice Requires="a14">
           <p:sp>
             <p:nvSpPr>
               <p:cNvPr id="5" name="テキスト ボックス 4">
@@ -11195,13 +9685,7 @@
                       <a:rPr lang="ja-JP" altLang="en-US" sz="2400" i="1" dirty="0" smtClean="0">
                         <a:latin typeface="Cambria Math" panose="02040503050406030204" pitchFamily="18" charset="0"/>
                       </a:rPr>
-                      <m:t>の</m:t>
-                    </m:r>
-                    <m:r>
-                      <a:rPr lang="ja-JP" altLang="en-US" sz="2400" i="1" dirty="0" smtClean="0">
-                        <a:latin typeface="Cambria Math" panose="02040503050406030204" pitchFamily="18" charset="0"/>
-                      </a:rPr>
-                      <m:t>ブレーキをかけ</m:t>
+                      <m:t>のブレーキをかけ</m:t>
                     </m:r>
                     <m:r>
                       <a:rPr lang="ja-JP" altLang="en-US" sz="2400" i="1" dirty="0">
@@ -11278,7 +9762,7 @@
             </p:txBody>
           </p:sp>
         </mc:Choice>
-        <mc:Fallback>
+        <mc:Fallback xmlns="">
           <p:sp>
             <p:nvSpPr>
               <p:cNvPr id="5" name="テキスト ボックス 4">
@@ -11323,8 +9807,8 @@
           </p:sp>
         </mc:Fallback>
       </mc:AlternateContent>
-      <mc:AlternateContent xmlns:mc="http://schemas.openxmlformats.org/markup-compatibility/2006">
-        <mc:Choice xmlns:a14="http://schemas.microsoft.com/office/drawing/2010/main" Requires="a14">
+      <mc:AlternateContent xmlns:mc="http://schemas.openxmlformats.org/markup-compatibility/2006" xmlns:a14="http://schemas.microsoft.com/office/drawing/2010/main">
+        <mc:Choice Requires="a14">
           <p:graphicFrame>
             <p:nvGraphicFramePr>
               <p:cNvPr id="2" name="表 2">
@@ -11671,7 +10155,7 @@
             </a:graphic>
           </p:graphicFrame>
         </mc:Choice>
-        <mc:Fallback>
+        <mc:Fallback xmlns="">
           <p:graphicFrame>
             <p:nvGraphicFramePr>
               <p:cNvPr id="2" name="表 2">
@@ -11860,8 +10344,8 @@
           </p:graphicFrame>
         </mc:Fallback>
       </mc:AlternateContent>
-      <mc:AlternateContent xmlns:mc="http://schemas.openxmlformats.org/markup-compatibility/2006">
-        <mc:Choice xmlns:a14="http://schemas.microsoft.com/office/drawing/2010/main" Requires="a14">
+      <mc:AlternateContent xmlns:mc="http://schemas.openxmlformats.org/markup-compatibility/2006" xmlns:a14="http://schemas.microsoft.com/office/drawing/2010/main">
+        <mc:Choice Requires="a14">
           <p:sp>
             <p:nvSpPr>
               <p:cNvPr id="6" name="テキスト ボックス 5">
@@ -11972,16 +10456,7 @@
                             </a:solidFill>
                             <a:latin typeface="Cambria Math" panose="02040503050406030204" pitchFamily="18" charset="0"/>
                           </a:rPr>
-                          <m:t>𝑣</m:t>
-                        </m:r>
-                        <m:r>
-                          <a:rPr lang="en-US" altLang="ja-JP" sz="2400" i="1">
-                            <a:solidFill>
-                              <a:srgbClr val="7030A0"/>
-                            </a:solidFill>
-                            <a:latin typeface="Cambria Math" panose="02040503050406030204" pitchFamily="18" charset="0"/>
-                          </a:rPr>
-                          <m:t>𝑖</m:t>
+                          <m:t>𝑣𝑖</m:t>
                         </m:r>
                       </m:e>
                       <m:sup>
@@ -12286,7 +10761,7 @@
             </p:txBody>
           </p:sp>
         </mc:Choice>
-        <mc:Fallback>
+        <mc:Fallback xmlns="">
           <p:sp>
             <p:nvSpPr>
               <p:cNvPr id="6" name="テキスト ボックス 5">
@@ -12344,7 +10819,7 @@
 </p:sld>
 </file>
 
-<file path=ppt/slides/slide8.xml><?xml version="1.0" encoding="utf-8"?>
+<file path=ppt/slides/slide7.xml><?xml version="1.0" encoding="utf-8"?>
 <p:sld xmlns:a="http://schemas.openxmlformats.org/drawingml/2006/main" xmlns:r="http://schemas.openxmlformats.org/officeDocument/2006/relationships" xmlns:p="http://schemas.openxmlformats.org/presentationml/2006/main">
   <p:cSld>
     <p:spTree>
@@ -12397,8 +10872,8 @@
           </a:p>
         </p:txBody>
       </p:sp>
-      <mc:AlternateContent xmlns:mc="http://schemas.openxmlformats.org/markup-compatibility/2006">
-        <mc:Choice xmlns:a14="http://schemas.microsoft.com/office/drawing/2010/main" Requires="a14">
+      <mc:AlternateContent xmlns:mc="http://schemas.openxmlformats.org/markup-compatibility/2006" xmlns:a14="http://schemas.microsoft.com/office/drawing/2010/main">
+        <mc:Choice Requires="a14">
           <p:sp>
             <p:nvSpPr>
               <p:cNvPr id="5" name="テキスト ボックス 4">
@@ -12506,13 +10981,7 @@
                       <a:rPr lang="ja-JP" altLang="en-US" sz="2400" i="1" dirty="0" smtClean="0">
                         <a:latin typeface="Cambria Math" panose="02040503050406030204" pitchFamily="18" charset="0"/>
                       </a:rPr>
-                      <m:t>の</m:t>
-                    </m:r>
-                    <m:r>
-                      <a:rPr lang="ja-JP" altLang="en-US" sz="2400" i="1" dirty="0" smtClean="0">
-                        <a:latin typeface="Cambria Math" panose="02040503050406030204" pitchFamily="18" charset="0"/>
-                      </a:rPr>
-                      <m:t>ブレーキをかけ</m:t>
+                      <m:t>のブレーキをかけ</m:t>
                     </m:r>
                     <m:r>
                       <a:rPr lang="ja-JP" altLang="en-US" sz="2400" i="1" dirty="0">
@@ -13585,7 +12054,7 @@
             </p:txBody>
           </p:sp>
         </mc:Choice>
-        <mc:Fallback>
+        <mc:Fallback xmlns="">
           <p:sp>
             <p:nvSpPr>
               <p:cNvPr id="5" name="テキスト ボックス 4">
@@ -13643,7 +12112,7 @@
 </p:sld>
 </file>
 
-<file path=ppt/slides/slide9.xml><?xml version="1.0" encoding="utf-8"?>
+<file path=ppt/slides/slide8.xml><?xml version="1.0" encoding="utf-8"?>
 <p:sld xmlns:a="http://schemas.openxmlformats.org/drawingml/2006/main" xmlns:r="http://schemas.openxmlformats.org/officeDocument/2006/relationships" xmlns:p="http://schemas.openxmlformats.org/presentationml/2006/main">
   <p:cSld>
     <p:spTree>
@@ -13765,8 +12234,8 @@
           </a:p>
         </p:txBody>
       </p:sp>
-      <mc:AlternateContent xmlns:mc="http://schemas.openxmlformats.org/markup-compatibility/2006">
-        <mc:Choice xmlns:a14="http://schemas.microsoft.com/office/drawing/2010/main" Requires="a14">
+      <mc:AlternateContent xmlns:mc="http://schemas.openxmlformats.org/markup-compatibility/2006" xmlns:a14="http://schemas.microsoft.com/office/drawing/2010/main">
+        <mc:Choice Requires="a14">
           <p:graphicFrame>
             <p:nvGraphicFramePr>
               <p:cNvPr id="2" name="表 2">
@@ -14141,7 +12610,7 @@
             </a:graphic>
           </p:graphicFrame>
         </mc:Choice>
-        <mc:Fallback>
+        <mc:Fallback xmlns="">
           <p:graphicFrame>
             <p:nvGraphicFramePr>
               <p:cNvPr id="2" name="表 2">
@@ -14336,8 +12805,8 @@
           </p:graphicFrame>
         </mc:Fallback>
       </mc:AlternateContent>
-      <mc:AlternateContent xmlns:mc="http://schemas.openxmlformats.org/markup-compatibility/2006">
-        <mc:Choice xmlns:a14="http://schemas.microsoft.com/office/drawing/2010/main" Requires="a14">
+      <mc:AlternateContent xmlns:mc="http://schemas.openxmlformats.org/markup-compatibility/2006" xmlns:a14="http://schemas.microsoft.com/office/drawing/2010/main">
+        <mc:Choice Requires="a14">
           <p:sp>
             <p:nvSpPr>
               <p:cNvPr id="6" name="テキスト ボックス 5">
@@ -14509,13 +12978,7 @@
                       <a:rPr lang="en-US" altLang="ja-JP" sz="2400" b="0" i="1" smtClean="0">
                         <a:latin typeface="Cambria Math" panose="02040503050406030204" pitchFamily="18" charset="0"/>
                       </a:rPr>
-                      <m:t>=</m:t>
-                    </m:r>
-                    <m:r>
-                      <a:rPr lang="en-US" altLang="ja-JP" sz="2400" b="0" i="1" smtClean="0">
-                        <a:latin typeface="Cambria Math" panose="02040503050406030204" pitchFamily="18" charset="0"/>
-                      </a:rPr>
-                      <m:t>0</m:t>
+                      <m:t>=0</m:t>
                     </m:r>
                     <m:r>
                       <a:rPr lang="en-US" altLang="ja-JP" sz="2400" b="0" i="1" smtClean="0">
@@ -14643,7 +13106,7 @@
             </p:txBody>
           </p:sp>
         </mc:Choice>
-        <mc:Fallback>
+        <mc:Fallback xmlns="">
           <p:sp>
             <p:nvSpPr>
               <p:cNvPr id="6" name="テキスト ボックス 5">
@@ -14692,6 +13155,789 @@
     <p:extLst>
       <p:ext uri="{BB962C8B-B14F-4D97-AF65-F5344CB8AC3E}">
         <p14:creationId xmlns:p14="http://schemas.microsoft.com/office/powerpoint/2010/main" val="3400334774"/>
+      </p:ext>
+    </p:extLst>
+  </p:cSld>
+  <p:clrMapOvr>
+    <a:masterClrMapping/>
+  </p:clrMapOvr>
+</p:sld>
+</file>
+
+<file path=ppt/slides/slide9.xml><?xml version="1.0" encoding="utf-8"?>
+<p:sld xmlns:a="http://schemas.openxmlformats.org/drawingml/2006/main" xmlns:r="http://schemas.openxmlformats.org/officeDocument/2006/relationships" xmlns:p="http://schemas.openxmlformats.org/presentationml/2006/main">
+  <p:cSld>
+    <p:spTree>
+      <p:nvGrpSpPr>
+        <p:cNvPr id="1" name=""/>
+        <p:cNvGrpSpPr/>
+        <p:nvPr/>
+      </p:nvGrpSpPr>
+      <p:grpSpPr>
+        <a:xfrm>
+          <a:off x="0" y="0"/>
+          <a:ext cx="0" cy="0"/>
+          <a:chOff x="0" y="0"/>
+          <a:chExt cx="0" cy="0"/>
+        </a:xfrm>
+      </p:grpSpPr>
+      <p:sp>
+        <p:nvSpPr>
+          <p:cNvPr id="4" name="テキスト ボックス 3">
+            <a:extLst>
+              <a:ext uri="{FF2B5EF4-FFF2-40B4-BE49-F238E27FC236}">
+                <a16:creationId xmlns:a16="http://schemas.microsoft.com/office/drawing/2014/main" id="{5A13BF46-B8C5-48AA-8308-C9ECFF431A18}"/>
+              </a:ext>
+            </a:extLst>
+          </p:cNvPr>
+          <p:cNvSpPr txBox="1"/>
+          <p:nvPr/>
+        </p:nvSpPr>
+        <p:spPr>
+          <a:xfrm>
+            <a:off x="567542" y="491954"/>
+            <a:ext cx="3584636" cy="584775"/>
+          </a:xfrm>
+          <a:prstGeom prst="rect">
+            <a:avLst/>
+          </a:prstGeom>
+          <a:noFill/>
+        </p:spPr>
+        <p:txBody>
+          <a:bodyPr wrap="none" rtlCol="0">
+            <a:spAutoFit/>
+          </a:bodyPr>
+          <a:lstStyle/>
+          <a:p>
+            <a:r>
+              <a:rPr kumimoji="1" lang="ja-JP" altLang="en-US" sz="3200" b="1" u="sng" dirty="0"/>
+              <a:t>一次元の運動 例題</a:t>
+            </a:r>
+            <a:endParaRPr kumimoji="1" lang="en-US" altLang="ja-JP" sz="3200" b="1" u="sng" dirty="0"/>
+          </a:p>
+        </p:txBody>
+      </p:sp>
+      <mc:AlternateContent xmlns:mc="http://schemas.openxmlformats.org/markup-compatibility/2006" xmlns:a14="http://schemas.microsoft.com/office/drawing/2010/main">
+        <mc:Choice Requires="a14">
+          <p:sp>
+            <p:nvSpPr>
+              <p:cNvPr id="5" name="テキスト ボックス 4">
+                <a:extLst>
+                  <a:ext uri="{FF2B5EF4-FFF2-40B4-BE49-F238E27FC236}">
+                    <a16:creationId xmlns:a16="http://schemas.microsoft.com/office/drawing/2014/main" id="{B1AEA830-DE7C-46CA-B059-02154763F37C}"/>
+                  </a:ext>
+                </a:extLst>
+              </p:cNvPr>
+              <p:cNvSpPr txBox="1"/>
+              <p:nvPr/>
+            </p:nvSpPr>
+            <p:spPr>
+              <a:xfrm>
+                <a:off x="567542" y="1217490"/>
+                <a:ext cx="10948831" cy="3786806"/>
+              </a:xfrm>
+              <a:prstGeom prst="rect">
+                <a:avLst/>
+              </a:prstGeom>
+              <a:noFill/>
+            </p:spPr>
+            <p:txBody>
+              <a:bodyPr wrap="none" rtlCol="0">
+                <a:spAutoFit/>
+              </a:bodyPr>
+              <a:lstStyle/>
+              <a:p>
+                <a:r>
+                  <a:rPr lang="ja-JP" altLang="en-US" sz="2400" dirty="0"/>
+                  <a:t>ゲーム中の岩が高台から落ちるとき、</a:t>
+                </a:r>
+                <a:r>
+                  <a:rPr lang="en-US" altLang="ja-JP" sz="2400" dirty="0"/>
+                  <a:t>50m</a:t>
+                </a:r>
+                <a:r>
+                  <a:rPr lang="ja-JP" altLang="en-US" sz="2400" dirty="0"/>
+                  <a:t>下の地面に落ちるまで何秒かかるか</a:t>
+                </a:r>
+                <a:endParaRPr lang="en-US" altLang="ja-JP" sz="2400" dirty="0"/>
+              </a:p>
+              <a:p>
+                <a:endParaRPr lang="en-US" altLang="ja-JP" sz="2400" dirty="0"/>
+              </a:p>
+              <a:p>
+                <a:r>
+                  <a:rPr lang="ja-JP" altLang="en-US" sz="2400" b="1" dirty="0">
+                    <a:solidFill>
+                      <a:srgbClr val="FF0000"/>
+                    </a:solidFill>
+                  </a:rPr>
+                  <a:t>■解答</a:t>
+                </a:r>
+                <a:endParaRPr lang="en-US" altLang="ja-JP" sz="2400" b="1" dirty="0">
+                  <a:solidFill>
+                    <a:srgbClr val="FF0000"/>
+                  </a:solidFill>
+                </a:endParaRPr>
+              </a:p>
+              <a:p>
+                <a14:m>
+                  <m:oMath xmlns:m="http://schemas.openxmlformats.org/officeDocument/2006/math">
+                    <m:r>
+                      <a:rPr lang="en-US" altLang="ja-JP" sz="2400" b="0" i="1" dirty="0" smtClean="0">
+                        <a:solidFill>
+                          <a:schemeClr val="tx1"/>
+                        </a:solidFill>
+                        <a:latin typeface="Cambria Math" panose="02040503050406030204" pitchFamily="18" charset="0"/>
+                      </a:rPr>
+                      <m:t>−50</m:t>
+                    </m:r>
+                    <m:r>
+                      <a:rPr lang="en-US" altLang="ja-JP" sz="2400" b="0" i="1" dirty="0" smtClean="0">
+                        <a:solidFill>
+                          <a:schemeClr val="tx1"/>
+                        </a:solidFill>
+                        <a:latin typeface="Cambria Math" panose="02040503050406030204" pitchFamily="18" charset="0"/>
+                      </a:rPr>
+                      <m:t>𝑚</m:t>
+                    </m:r>
+                    <m:r>
+                      <a:rPr lang="en-US" altLang="ja-JP" sz="2400" b="0" i="1" smtClean="0">
+                        <a:latin typeface="Cambria Math" panose="02040503050406030204" pitchFamily="18" charset="0"/>
+                      </a:rPr>
+                      <m:t>=0</m:t>
+                    </m:r>
+                    <m:r>
+                      <a:rPr lang="en-US" altLang="ja-JP" sz="2400" b="0" i="1" smtClean="0">
+                        <a:latin typeface="Cambria Math" panose="02040503050406030204" pitchFamily="18" charset="0"/>
+                      </a:rPr>
+                      <m:t>𝑡</m:t>
+                    </m:r>
+                    <m:r>
+                      <a:rPr lang="en-US" altLang="ja-JP" sz="2400" b="0" i="1" smtClean="0">
+                        <a:latin typeface="Cambria Math" panose="02040503050406030204" pitchFamily="18" charset="0"/>
+                      </a:rPr>
+                      <m:t>+</m:t>
+                    </m:r>
+                    <m:f>
+                      <m:fPr>
+                        <m:ctrlPr>
+                          <a:rPr lang="en-US" altLang="ja-JP" sz="2400" i="1" smtClean="0">
+                            <a:latin typeface="Cambria Math" panose="02040503050406030204" pitchFamily="18" charset="0"/>
+                          </a:rPr>
+                        </m:ctrlPr>
+                      </m:fPr>
+                      <m:num>
+                        <m:r>
+                          <a:rPr lang="en-US" altLang="ja-JP" sz="2400" b="0" i="1" smtClean="0">
+                            <a:latin typeface="Cambria Math" panose="02040503050406030204" pitchFamily="18" charset="0"/>
+                          </a:rPr>
+                          <m:t>1</m:t>
+                        </m:r>
+                      </m:num>
+                      <m:den>
+                        <m:r>
+                          <a:rPr lang="en-US" altLang="ja-JP" sz="2400" b="0" i="1" smtClean="0">
+                            <a:latin typeface="Cambria Math" panose="02040503050406030204" pitchFamily="18" charset="0"/>
+                          </a:rPr>
+                          <m:t>2</m:t>
+                        </m:r>
+                      </m:den>
+                    </m:f>
+                    <m:d>
+                      <m:dPr>
+                        <m:ctrlPr>
+                          <a:rPr lang="en-US" altLang="ja-JP" sz="2400" b="0" i="1" smtClean="0">
+                            <a:latin typeface="Cambria Math" panose="02040503050406030204" pitchFamily="18" charset="0"/>
+                          </a:rPr>
+                        </m:ctrlPr>
+                      </m:dPr>
+                      <m:e>
+                        <m:r>
+                          <a:rPr lang="en-US" altLang="ja-JP" sz="2400" i="1">
+                            <a:latin typeface="Cambria Math" panose="02040503050406030204" pitchFamily="18" charset="0"/>
+                          </a:rPr>
+                          <m:t>−9.8</m:t>
+                        </m:r>
+                        <m:r>
+                          <a:rPr lang="en-US" altLang="ja-JP" sz="2400" i="1">
+                            <a:latin typeface="Cambria Math" panose="02040503050406030204" pitchFamily="18" charset="0"/>
+                          </a:rPr>
+                          <m:t>𝑚</m:t>
+                        </m:r>
+                        <m:r>
+                          <a:rPr lang="en-US" altLang="ja-JP" sz="2400" i="1">
+                            <a:latin typeface="Cambria Math" panose="02040503050406030204" pitchFamily="18" charset="0"/>
+                          </a:rPr>
+                          <m:t>/</m:t>
+                        </m:r>
+                        <m:sSup>
+                          <m:sSupPr>
+                            <m:ctrlPr>
+                              <a:rPr lang="en-US" altLang="ja-JP" sz="2400" i="1">
+                                <a:latin typeface="Cambria Math" panose="02040503050406030204" pitchFamily="18" charset="0"/>
+                              </a:rPr>
+                            </m:ctrlPr>
+                          </m:sSupPr>
+                          <m:e>
+                            <m:r>
+                              <a:rPr lang="ja-JP" altLang="en-US" sz="2400" i="1">
+                                <a:latin typeface="Cambria Math" panose="02040503050406030204" pitchFamily="18" charset="0"/>
+                              </a:rPr>
+                              <m:t>秒</m:t>
+                            </m:r>
+                          </m:e>
+                          <m:sup>
+                            <m:r>
+                              <a:rPr lang="en-US" altLang="ja-JP" sz="2400" i="1">
+                                <a:latin typeface="Cambria Math" panose="02040503050406030204" pitchFamily="18" charset="0"/>
+                              </a:rPr>
+                              <m:t>2</m:t>
+                            </m:r>
+                          </m:sup>
+                        </m:sSup>
+                      </m:e>
+                    </m:d>
+                    <m:sSup>
+                      <m:sSupPr>
+                        <m:ctrlPr>
+                          <a:rPr lang="en-US" altLang="ja-JP" sz="2400" b="0" i="1" smtClean="0">
+                            <a:latin typeface="Cambria Math" panose="02040503050406030204" pitchFamily="18" charset="0"/>
+                          </a:rPr>
+                        </m:ctrlPr>
+                      </m:sSupPr>
+                      <m:e>
+                        <m:r>
+                          <a:rPr lang="en-US" altLang="ja-JP" sz="2400" b="0" i="1" smtClean="0">
+                            <a:latin typeface="Cambria Math" panose="02040503050406030204" pitchFamily="18" charset="0"/>
+                          </a:rPr>
+                          <m:t>𝑡</m:t>
+                        </m:r>
+                      </m:e>
+                      <m:sup>
+                        <m:r>
+                          <a:rPr lang="en-US" altLang="ja-JP" sz="2400" b="0" i="1" smtClean="0">
+                            <a:latin typeface="Cambria Math" panose="02040503050406030204" pitchFamily="18" charset="0"/>
+                          </a:rPr>
+                          <m:t>2</m:t>
+                        </m:r>
+                      </m:sup>
+                    </m:sSup>
+                  </m:oMath>
+                </a14:m>
+                <a:r>
+                  <a:rPr lang="en-US" altLang="ja-JP" sz="2400" dirty="0"/>
+                  <a:t> </a:t>
+                </a:r>
+              </a:p>
+              <a:p>
+                <a14:m>
+                  <m:oMath xmlns:m="http://schemas.openxmlformats.org/officeDocument/2006/math">
+                    <m:r>
+                      <a:rPr lang="en-US" altLang="ja-JP" sz="2400" b="0" i="1" dirty="0" smtClean="0">
+                        <a:solidFill>
+                          <a:schemeClr val="tx1"/>
+                        </a:solidFill>
+                        <a:latin typeface="Cambria Math" panose="02040503050406030204" pitchFamily="18" charset="0"/>
+                      </a:rPr>
+                      <m:t>−50</m:t>
+                    </m:r>
+                    <m:r>
+                      <a:rPr lang="en-US" altLang="ja-JP" sz="2400" b="0" i="1" dirty="0" smtClean="0">
+                        <a:solidFill>
+                          <a:schemeClr val="tx1"/>
+                        </a:solidFill>
+                        <a:latin typeface="Cambria Math" panose="02040503050406030204" pitchFamily="18" charset="0"/>
+                      </a:rPr>
+                      <m:t>𝑚</m:t>
+                    </m:r>
+                    <m:r>
+                      <a:rPr lang="en-US" altLang="ja-JP" sz="2400" b="0" i="1" smtClean="0">
+                        <a:latin typeface="Cambria Math" panose="02040503050406030204" pitchFamily="18" charset="0"/>
+                      </a:rPr>
+                      <m:t>=</m:t>
+                    </m:r>
+                    <m:r>
+                      <a:rPr lang="en-US" altLang="ja-JP" sz="2400" i="1">
+                        <a:latin typeface="Cambria Math" panose="02040503050406030204" pitchFamily="18" charset="0"/>
+                      </a:rPr>
+                      <m:t>−4.9</m:t>
+                    </m:r>
+                    <m:r>
+                      <a:rPr lang="en-US" altLang="ja-JP" sz="2400" i="1">
+                        <a:latin typeface="Cambria Math" panose="02040503050406030204" pitchFamily="18" charset="0"/>
+                      </a:rPr>
+                      <m:t>𝑚</m:t>
+                    </m:r>
+                    <m:r>
+                      <a:rPr lang="en-US" altLang="ja-JP" sz="2400" i="1">
+                        <a:latin typeface="Cambria Math" panose="02040503050406030204" pitchFamily="18" charset="0"/>
+                      </a:rPr>
+                      <m:t>/</m:t>
+                    </m:r>
+                    <m:sSup>
+                      <m:sSupPr>
+                        <m:ctrlPr>
+                          <a:rPr lang="en-US" altLang="ja-JP" sz="2400" i="1">
+                            <a:latin typeface="Cambria Math" panose="02040503050406030204" pitchFamily="18" charset="0"/>
+                          </a:rPr>
+                        </m:ctrlPr>
+                      </m:sSupPr>
+                      <m:e>
+                        <m:r>
+                          <a:rPr lang="ja-JP" altLang="en-US" sz="2400" i="1">
+                            <a:latin typeface="Cambria Math" panose="02040503050406030204" pitchFamily="18" charset="0"/>
+                          </a:rPr>
+                          <m:t>秒</m:t>
+                        </m:r>
+                      </m:e>
+                      <m:sup>
+                        <m:r>
+                          <a:rPr lang="en-US" altLang="ja-JP" sz="2400" i="1">
+                            <a:latin typeface="Cambria Math" panose="02040503050406030204" pitchFamily="18" charset="0"/>
+                          </a:rPr>
+                          <m:t>2</m:t>
+                        </m:r>
+                      </m:sup>
+                    </m:sSup>
+                    <m:sSup>
+                      <m:sSupPr>
+                        <m:ctrlPr>
+                          <a:rPr lang="en-US" altLang="ja-JP" sz="2400" b="0" i="1" smtClean="0">
+                            <a:latin typeface="Cambria Math" panose="02040503050406030204" pitchFamily="18" charset="0"/>
+                          </a:rPr>
+                        </m:ctrlPr>
+                      </m:sSupPr>
+                      <m:e>
+                        <m:r>
+                          <a:rPr lang="en-US" altLang="ja-JP" sz="2400" b="0" i="1" smtClean="0">
+                            <a:latin typeface="Cambria Math" panose="02040503050406030204" pitchFamily="18" charset="0"/>
+                          </a:rPr>
+                          <m:t>𝑡</m:t>
+                        </m:r>
+                      </m:e>
+                      <m:sup>
+                        <m:r>
+                          <a:rPr lang="en-US" altLang="ja-JP" sz="2400" b="0" i="1" smtClean="0">
+                            <a:latin typeface="Cambria Math" panose="02040503050406030204" pitchFamily="18" charset="0"/>
+                          </a:rPr>
+                          <m:t>2</m:t>
+                        </m:r>
+                      </m:sup>
+                    </m:sSup>
+                  </m:oMath>
+                </a14:m>
+                <a:r>
+                  <a:rPr lang="en-US" altLang="ja-JP" sz="2400" dirty="0"/>
+                  <a:t> </a:t>
+                </a:r>
+              </a:p>
+              <a:p>
+                <a14:m>
+                  <m:oMath xmlns:m="http://schemas.openxmlformats.org/officeDocument/2006/math">
+                    <m:sSup>
+                      <m:sSupPr>
+                        <m:ctrlPr>
+                          <a:rPr lang="en-US" altLang="ja-JP" sz="2400" i="1">
+                            <a:latin typeface="Cambria Math" panose="02040503050406030204" pitchFamily="18" charset="0"/>
+                          </a:rPr>
+                        </m:ctrlPr>
+                      </m:sSupPr>
+                      <m:e>
+                        <m:r>
+                          <a:rPr lang="en-US" altLang="ja-JP" sz="2400" i="1">
+                            <a:latin typeface="Cambria Math" panose="02040503050406030204" pitchFamily="18" charset="0"/>
+                          </a:rPr>
+                          <m:t>𝑡</m:t>
+                        </m:r>
+                      </m:e>
+                      <m:sup>
+                        <m:r>
+                          <a:rPr lang="en-US" altLang="ja-JP" sz="2400" i="1">
+                            <a:latin typeface="Cambria Math" panose="02040503050406030204" pitchFamily="18" charset="0"/>
+                          </a:rPr>
+                          <m:t>2</m:t>
+                        </m:r>
+                      </m:sup>
+                    </m:sSup>
+                    <m:r>
+                      <a:rPr lang="en-US" altLang="ja-JP" sz="2400" b="0" i="1" smtClean="0">
+                        <a:latin typeface="Cambria Math" panose="02040503050406030204" pitchFamily="18" charset="0"/>
+                      </a:rPr>
+                      <m:t>=</m:t>
+                    </m:r>
+                    <m:r>
+                      <a:rPr lang="en-US" altLang="ja-JP" sz="2400" i="1" dirty="0" smtClean="0">
+                        <a:latin typeface="Cambria Math" panose="02040503050406030204" pitchFamily="18" charset="0"/>
+                      </a:rPr>
+                      <m:t>−50</m:t>
+                    </m:r>
+                    <m:r>
+                      <a:rPr lang="en-US" altLang="ja-JP" sz="2400" i="1" dirty="0" smtClean="0">
+                        <a:latin typeface="Cambria Math" panose="02040503050406030204" pitchFamily="18" charset="0"/>
+                      </a:rPr>
+                      <m:t>𝑚</m:t>
+                    </m:r>
+                    <m:r>
+                      <a:rPr lang="en-US" altLang="ja-JP" sz="2400" i="1">
+                        <a:latin typeface="Cambria Math" panose="02040503050406030204" pitchFamily="18" charset="0"/>
+                      </a:rPr>
+                      <m:t>÷</m:t>
+                    </m:r>
+                    <m:d>
+                      <m:dPr>
+                        <m:ctrlPr>
+                          <a:rPr lang="en-US" altLang="ja-JP" sz="2400" i="1">
+                            <a:latin typeface="Cambria Math" panose="02040503050406030204" pitchFamily="18" charset="0"/>
+                          </a:rPr>
+                        </m:ctrlPr>
+                      </m:dPr>
+                      <m:e>
+                        <m:r>
+                          <a:rPr lang="en-US" altLang="ja-JP" sz="2400" i="1">
+                            <a:latin typeface="Cambria Math" panose="02040503050406030204" pitchFamily="18" charset="0"/>
+                          </a:rPr>
+                          <m:t>−</m:t>
+                        </m:r>
+                        <m:f>
+                          <m:fPr>
+                            <m:ctrlPr>
+                              <a:rPr lang="en-US" altLang="ja-JP" sz="2400" i="1">
+                                <a:latin typeface="Cambria Math" panose="02040503050406030204" pitchFamily="18" charset="0"/>
+                              </a:rPr>
+                            </m:ctrlPr>
+                          </m:fPr>
+                          <m:num>
+                            <m:r>
+                              <a:rPr lang="en-US" altLang="ja-JP" sz="2400" i="1">
+                                <a:latin typeface="Cambria Math" panose="02040503050406030204" pitchFamily="18" charset="0"/>
+                              </a:rPr>
+                              <m:t>4.9</m:t>
+                            </m:r>
+                            <m:r>
+                              <a:rPr lang="en-US" altLang="ja-JP" sz="2400" i="1">
+                                <a:latin typeface="Cambria Math" panose="02040503050406030204" pitchFamily="18" charset="0"/>
+                              </a:rPr>
+                              <m:t>𝑚</m:t>
+                            </m:r>
+                          </m:num>
+                          <m:den>
+                            <m:sSup>
+                              <m:sSupPr>
+                                <m:ctrlPr>
+                                  <a:rPr lang="en-US" altLang="ja-JP" sz="2400" i="1">
+                                    <a:latin typeface="Cambria Math" panose="02040503050406030204" pitchFamily="18" charset="0"/>
+                                  </a:rPr>
+                                </m:ctrlPr>
+                              </m:sSupPr>
+                              <m:e>
+                                <m:r>
+                                  <a:rPr lang="ja-JP" altLang="en-US" sz="2400" i="1">
+                                    <a:latin typeface="Cambria Math" panose="02040503050406030204" pitchFamily="18" charset="0"/>
+                                  </a:rPr>
+                                  <m:t>秒</m:t>
+                                </m:r>
+                              </m:e>
+                              <m:sup>
+                                <m:r>
+                                  <a:rPr lang="en-US" altLang="ja-JP" sz="2400" i="1">
+                                    <a:latin typeface="Cambria Math" panose="02040503050406030204" pitchFamily="18" charset="0"/>
+                                  </a:rPr>
+                                  <m:t>2</m:t>
+                                </m:r>
+                              </m:sup>
+                            </m:sSup>
+                          </m:den>
+                        </m:f>
+                      </m:e>
+                    </m:d>
+                    <m:r>
+                      <a:rPr lang="en-US" altLang="ja-JP" sz="2400" b="0" i="1" dirty="0" smtClean="0">
+                        <a:latin typeface="Cambria Math" panose="02040503050406030204" pitchFamily="18" charset="0"/>
+                      </a:rPr>
+                      <m:t>=</m:t>
+                    </m:r>
+                    <m:r>
+                      <a:rPr lang="en-US" altLang="ja-JP" sz="2400" i="1" dirty="0">
+                        <a:latin typeface="Cambria Math" panose="02040503050406030204" pitchFamily="18" charset="0"/>
+                      </a:rPr>
+                      <m:t>−50</m:t>
+                    </m:r>
+                    <m:r>
+                      <a:rPr lang="en-US" altLang="ja-JP" sz="2400" i="1" dirty="0">
+                        <a:latin typeface="Cambria Math" panose="02040503050406030204" pitchFamily="18" charset="0"/>
+                      </a:rPr>
+                      <m:t>𝑚</m:t>
+                    </m:r>
+                    <m:r>
+                      <a:rPr lang="en-US" altLang="ja-JP" sz="2400" i="1" dirty="0" smtClean="0">
+                        <a:latin typeface="Cambria Math" panose="02040503050406030204" pitchFamily="18" charset="0"/>
+                      </a:rPr>
+                      <m:t>×</m:t>
+                    </m:r>
+                    <m:d>
+                      <m:dPr>
+                        <m:ctrlPr>
+                          <a:rPr lang="en-US" altLang="ja-JP" sz="2400" i="1">
+                            <a:latin typeface="Cambria Math" panose="02040503050406030204" pitchFamily="18" charset="0"/>
+                          </a:rPr>
+                        </m:ctrlPr>
+                      </m:dPr>
+                      <m:e>
+                        <m:r>
+                          <a:rPr lang="en-US" altLang="ja-JP" sz="2400" i="1">
+                            <a:latin typeface="Cambria Math" panose="02040503050406030204" pitchFamily="18" charset="0"/>
+                          </a:rPr>
+                          <m:t>−</m:t>
+                        </m:r>
+                        <m:f>
+                          <m:fPr>
+                            <m:ctrlPr>
+                              <a:rPr lang="en-US" altLang="ja-JP" sz="2400" i="1">
+                                <a:latin typeface="Cambria Math" panose="02040503050406030204" pitchFamily="18" charset="0"/>
+                              </a:rPr>
+                            </m:ctrlPr>
+                          </m:fPr>
+                          <m:num>
+                            <m:sSup>
+                              <m:sSupPr>
+                                <m:ctrlPr>
+                                  <a:rPr lang="en-US" altLang="ja-JP" sz="2400" i="1">
+                                    <a:latin typeface="Cambria Math" panose="02040503050406030204" pitchFamily="18" charset="0"/>
+                                  </a:rPr>
+                                </m:ctrlPr>
+                              </m:sSupPr>
+                              <m:e>
+                                <m:r>
+                                  <a:rPr lang="ja-JP" altLang="en-US" sz="2400" i="1">
+                                    <a:latin typeface="Cambria Math" panose="02040503050406030204" pitchFamily="18" charset="0"/>
+                                  </a:rPr>
+                                  <m:t>秒</m:t>
+                                </m:r>
+                              </m:e>
+                              <m:sup>
+                                <m:r>
+                                  <a:rPr lang="en-US" altLang="ja-JP" sz="2400" i="1">
+                                    <a:latin typeface="Cambria Math" panose="02040503050406030204" pitchFamily="18" charset="0"/>
+                                  </a:rPr>
+                                  <m:t>2</m:t>
+                                </m:r>
+                              </m:sup>
+                            </m:sSup>
+                          </m:num>
+                          <m:den>
+                            <m:r>
+                              <a:rPr lang="en-US" altLang="ja-JP" sz="2400" i="1">
+                                <a:latin typeface="Cambria Math" panose="02040503050406030204" pitchFamily="18" charset="0"/>
+                              </a:rPr>
+                              <m:t>4.9</m:t>
+                            </m:r>
+                            <m:r>
+                              <a:rPr lang="en-US" altLang="ja-JP" sz="2400" i="1">
+                                <a:latin typeface="Cambria Math" panose="02040503050406030204" pitchFamily="18" charset="0"/>
+                              </a:rPr>
+                              <m:t>𝑚</m:t>
+                            </m:r>
+                          </m:den>
+                        </m:f>
+                      </m:e>
+                    </m:d>
+                    <m:r>
+                      <a:rPr lang="en-US" altLang="ja-JP" sz="2400" b="0" i="1" dirty="0" smtClean="0">
+                        <a:latin typeface="Cambria Math" panose="02040503050406030204" pitchFamily="18" charset="0"/>
+                      </a:rPr>
+                      <m:t>=</m:t>
+                    </m:r>
+                    <m:f>
+                      <m:fPr>
+                        <m:ctrlPr>
+                          <a:rPr lang="en-US" altLang="ja-JP" sz="2400" i="1">
+                            <a:latin typeface="Cambria Math" panose="02040503050406030204" pitchFamily="18" charset="0"/>
+                          </a:rPr>
+                        </m:ctrlPr>
+                      </m:fPr>
+                      <m:num>
+                        <m:r>
+                          <a:rPr lang="en-US" altLang="ja-JP" sz="2400" b="0" i="1" smtClean="0">
+                            <a:latin typeface="Cambria Math" panose="02040503050406030204" pitchFamily="18" charset="0"/>
+                          </a:rPr>
+                          <m:t>50</m:t>
+                        </m:r>
+                      </m:num>
+                      <m:den>
+                        <m:r>
+                          <a:rPr lang="en-US" altLang="ja-JP" sz="2400" b="0" i="1" dirty="0" smtClean="0">
+                            <a:latin typeface="Cambria Math" panose="02040503050406030204" pitchFamily="18" charset="0"/>
+                          </a:rPr>
+                          <m:t>49</m:t>
+                        </m:r>
+                      </m:den>
+                    </m:f>
+                    <m:sSup>
+                      <m:sSupPr>
+                        <m:ctrlPr>
+                          <a:rPr lang="en-US" altLang="ja-JP" sz="2400" i="1">
+                            <a:latin typeface="Cambria Math" panose="02040503050406030204" pitchFamily="18" charset="0"/>
+                          </a:rPr>
+                        </m:ctrlPr>
+                      </m:sSupPr>
+                      <m:e>
+                        <m:r>
+                          <a:rPr lang="ja-JP" altLang="en-US" sz="2400" i="1">
+                            <a:latin typeface="Cambria Math" panose="02040503050406030204" pitchFamily="18" charset="0"/>
+                          </a:rPr>
+                          <m:t>秒</m:t>
+                        </m:r>
+                      </m:e>
+                      <m:sup>
+                        <m:r>
+                          <a:rPr lang="en-US" altLang="ja-JP" sz="2400" i="1">
+                            <a:latin typeface="Cambria Math" panose="02040503050406030204" pitchFamily="18" charset="0"/>
+                          </a:rPr>
+                          <m:t>2</m:t>
+                        </m:r>
+                      </m:sup>
+                    </m:sSup>
+                  </m:oMath>
+                </a14:m>
+                <a:r>
+                  <a:rPr lang="ja-JP" altLang="en-US" sz="2400" dirty="0"/>
+                  <a:t>　</a:t>
+                </a:r>
+                <a:endParaRPr lang="en-US" altLang="ja-JP" sz="2400" dirty="0"/>
+              </a:p>
+              <a:p>
+                <a14:m>
+                  <m:oMath xmlns:m="http://schemas.openxmlformats.org/officeDocument/2006/math">
+                    <m:r>
+                      <a:rPr lang="en-US" altLang="ja-JP" sz="2400" i="1" smtClean="0">
+                        <a:latin typeface="Cambria Math" panose="02040503050406030204" pitchFamily="18" charset="0"/>
+                      </a:rPr>
+                      <m:t>𝑡</m:t>
+                    </m:r>
+                    <m:r>
+                      <a:rPr lang="en-US" altLang="ja-JP" sz="2400" b="0" i="1" smtClean="0">
+                        <a:latin typeface="Cambria Math" panose="02040503050406030204" pitchFamily="18" charset="0"/>
+                      </a:rPr>
+                      <m:t>=</m:t>
+                    </m:r>
+                    <m:rad>
+                      <m:radPr>
+                        <m:degHide m:val="on"/>
+                        <m:ctrlPr>
+                          <a:rPr lang="en-US" altLang="ja-JP" sz="2400" b="0" i="1" smtClean="0">
+                            <a:solidFill>
+                              <a:srgbClr val="FF0000"/>
+                            </a:solidFill>
+                            <a:latin typeface="Cambria Math" panose="02040503050406030204" pitchFamily="18" charset="0"/>
+                          </a:rPr>
+                        </m:ctrlPr>
+                      </m:radPr>
+                      <m:deg/>
+                      <m:e>
+                        <m:f>
+                          <m:fPr>
+                            <m:ctrlPr>
+                              <a:rPr lang="en-US" altLang="ja-JP" sz="2400" i="1">
+                                <a:solidFill>
+                                  <a:srgbClr val="FF0000"/>
+                                </a:solidFill>
+                                <a:latin typeface="Cambria Math" panose="02040503050406030204" pitchFamily="18" charset="0"/>
+                              </a:rPr>
+                            </m:ctrlPr>
+                          </m:fPr>
+                          <m:num>
+                            <m:r>
+                              <a:rPr lang="en-US" altLang="ja-JP" sz="2400" i="1">
+                                <a:solidFill>
+                                  <a:srgbClr val="FF0000"/>
+                                </a:solidFill>
+                                <a:latin typeface="Cambria Math" panose="02040503050406030204" pitchFamily="18" charset="0"/>
+                              </a:rPr>
+                              <m:t>50</m:t>
+                            </m:r>
+                          </m:num>
+                          <m:den>
+                            <m:r>
+                              <a:rPr lang="en-US" altLang="ja-JP" sz="2400" i="1" dirty="0">
+                                <a:solidFill>
+                                  <a:srgbClr val="FF0000"/>
+                                </a:solidFill>
+                                <a:latin typeface="Cambria Math" panose="02040503050406030204" pitchFamily="18" charset="0"/>
+                              </a:rPr>
+                              <m:t>49</m:t>
+                            </m:r>
+                          </m:den>
+                        </m:f>
+                      </m:e>
+                    </m:rad>
+                    <m:r>
+                      <a:rPr lang="ja-JP" altLang="en-US" sz="2400" i="1">
+                        <a:solidFill>
+                          <a:srgbClr val="FF0000"/>
+                        </a:solidFill>
+                        <a:latin typeface="Cambria Math" panose="02040503050406030204" pitchFamily="18" charset="0"/>
+                      </a:rPr>
+                      <m:t>秒</m:t>
+                    </m:r>
+                  </m:oMath>
+                </a14:m>
+                <a:r>
+                  <a:rPr lang="en-US" altLang="ja-JP" sz="2400" dirty="0"/>
+                  <a:t> </a:t>
+                </a:r>
+              </a:p>
+            </p:txBody>
+          </p:sp>
+        </mc:Choice>
+        <mc:Fallback xmlns="">
+          <p:sp>
+            <p:nvSpPr>
+              <p:cNvPr id="5" name="テキスト ボックス 4">
+                <a:extLst>
+                  <a:ext uri="{FF2B5EF4-FFF2-40B4-BE49-F238E27FC236}">
+                    <a16:creationId xmlns:a16="http://schemas.microsoft.com/office/drawing/2014/main" id="{B1AEA830-DE7C-46CA-B059-02154763F37C}"/>
+                  </a:ext>
+                </a:extLst>
+              </p:cNvPr>
+              <p:cNvSpPr txBox="1">
+                <a:spLocks noRot="1" noChangeAspect="1" noMove="1" noResize="1" noEditPoints="1" noAdjustHandles="1" noChangeArrowheads="1" noChangeShapeType="1" noTextEdit="1"/>
+              </p:cNvSpPr>
+              <p:nvPr/>
+            </p:nvSpPr>
+            <p:spPr>
+              <a:xfrm>
+                <a:off x="567542" y="1217490"/>
+                <a:ext cx="10948831" cy="3786806"/>
+              </a:xfrm>
+              <a:prstGeom prst="rect">
+                <a:avLst/>
+              </a:prstGeom>
+              <a:blipFill>
+                <a:blip r:embed="rId2"/>
+                <a:stretch>
+                  <a:fillRect l="-835" t="-1288"/>
+                </a:stretch>
+              </a:blipFill>
+            </p:spPr>
+            <p:txBody>
+              <a:bodyPr/>
+              <a:lstStyle/>
+              <a:p>
+                <a:r>
+                  <a:rPr lang="ja-JP" altLang="en-US">
+                    <a:noFill/>
+                  </a:rPr>
+                  <a:t> </a:t>
+                </a:r>
+              </a:p>
+            </p:txBody>
+          </p:sp>
+        </mc:Fallback>
+      </mc:AlternateContent>
+    </p:spTree>
+    <p:extLst>
+      <p:ext uri="{BB962C8B-B14F-4D97-AF65-F5344CB8AC3E}">
+        <p14:creationId xmlns:p14="http://schemas.microsoft.com/office/powerpoint/2010/main" val="717380680"/>
       </p:ext>
     </p:extLst>
   </p:cSld>

--- a/ゲーム科2年/00_前期/ゲーム開発Ⅰ/ゲーム物理学/座学/07_一次元の運動.pptx
+++ b/ゲーム科2年/00_前期/ゲーム開発Ⅰ/ゲーム物理学/座学/07_一次元の運動.pptx
@@ -270,7 +270,7 @@
           <a:p>
             <a:fld id="{E9CC885B-4903-4D54-9A93-00025F12DED9}" type="datetimeFigureOut">
               <a:rPr kumimoji="1" lang="ja-JP" altLang="en-US" smtClean="0"/>
-              <a:t>2025/3/5</a:t>
+              <a:t>2025/9/29</a:t>
             </a:fld>
             <a:endParaRPr kumimoji="1" lang="ja-JP" altLang="en-US"/>
           </a:p>
@@ -500,7 +500,7 @@
           <a:p>
             <a:fld id="{E9CC885B-4903-4D54-9A93-00025F12DED9}" type="datetimeFigureOut">
               <a:rPr kumimoji="1" lang="ja-JP" altLang="en-US" smtClean="0"/>
-              <a:t>2025/3/5</a:t>
+              <a:t>2025/9/29</a:t>
             </a:fld>
             <a:endParaRPr kumimoji="1" lang="ja-JP" altLang="en-US"/>
           </a:p>
@@ -740,7 +740,7 @@
           <a:p>
             <a:fld id="{E9CC885B-4903-4D54-9A93-00025F12DED9}" type="datetimeFigureOut">
               <a:rPr kumimoji="1" lang="ja-JP" altLang="en-US" smtClean="0"/>
-              <a:t>2025/3/5</a:t>
+              <a:t>2025/9/29</a:t>
             </a:fld>
             <a:endParaRPr kumimoji="1" lang="ja-JP" altLang="en-US"/>
           </a:p>
@@ -970,7 +970,7 @@
           <a:p>
             <a:fld id="{E9CC885B-4903-4D54-9A93-00025F12DED9}" type="datetimeFigureOut">
               <a:rPr kumimoji="1" lang="ja-JP" altLang="en-US" smtClean="0"/>
-              <a:t>2025/3/5</a:t>
+              <a:t>2025/9/29</a:t>
             </a:fld>
             <a:endParaRPr kumimoji="1" lang="ja-JP" altLang="en-US"/>
           </a:p>
@@ -1245,7 +1245,7 @@
           <a:p>
             <a:fld id="{E9CC885B-4903-4D54-9A93-00025F12DED9}" type="datetimeFigureOut">
               <a:rPr kumimoji="1" lang="ja-JP" altLang="en-US" smtClean="0"/>
-              <a:t>2025/3/5</a:t>
+              <a:t>2025/9/29</a:t>
             </a:fld>
             <a:endParaRPr kumimoji="1" lang="ja-JP" altLang="en-US"/>
           </a:p>
@@ -1574,7 +1574,7 @@
           <a:p>
             <a:fld id="{E9CC885B-4903-4D54-9A93-00025F12DED9}" type="datetimeFigureOut">
               <a:rPr kumimoji="1" lang="ja-JP" altLang="en-US" smtClean="0"/>
-              <a:t>2025/3/5</a:t>
+              <a:t>2025/9/29</a:t>
             </a:fld>
             <a:endParaRPr kumimoji="1" lang="ja-JP" altLang="en-US"/>
           </a:p>
@@ -2050,7 +2050,7 @@
           <a:p>
             <a:fld id="{E9CC885B-4903-4D54-9A93-00025F12DED9}" type="datetimeFigureOut">
               <a:rPr kumimoji="1" lang="ja-JP" altLang="en-US" smtClean="0"/>
-              <a:t>2025/3/5</a:t>
+              <a:t>2025/9/29</a:t>
             </a:fld>
             <a:endParaRPr kumimoji="1" lang="ja-JP" altLang="en-US"/>
           </a:p>
@@ -2191,7 +2191,7 @@
           <a:p>
             <a:fld id="{E9CC885B-4903-4D54-9A93-00025F12DED9}" type="datetimeFigureOut">
               <a:rPr kumimoji="1" lang="ja-JP" altLang="en-US" smtClean="0"/>
-              <a:t>2025/3/5</a:t>
+              <a:t>2025/9/29</a:t>
             </a:fld>
             <a:endParaRPr kumimoji="1" lang="ja-JP" altLang="en-US"/>
           </a:p>
@@ -2304,7 +2304,7 @@
           <a:p>
             <a:fld id="{E9CC885B-4903-4D54-9A93-00025F12DED9}" type="datetimeFigureOut">
               <a:rPr kumimoji="1" lang="ja-JP" altLang="en-US" smtClean="0"/>
-              <a:t>2025/3/5</a:t>
+              <a:t>2025/9/29</a:t>
             </a:fld>
             <a:endParaRPr kumimoji="1" lang="ja-JP" altLang="en-US"/>
           </a:p>
@@ -2647,7 +2647,7 @@
           <a:p>
             <a:fld id="{E9CC885B-4903-4D54-9A93-00025F12DED9}" type="datetimeFigureOut">
               <a:rPr kumimoji="1" lang="ja-JP" altLang="en-US" smtClean="0"/>
-              <a:t>2025/3/5</a:t>
+              <a:t>2025/9/29</a:t>
             </a:fld>
             <a:endParaRPr kumimoji="1" lang="ja-JP" altLang="en-US"/>
           </a:p>
@@ -2935,7 +2935,7 @@
           <a:p>
             <a:fld id="{E9CC885B-4903-4D54-9A93-00025F12DED9}" type="datetimeFigureOut">
               <a:rPr kumimoji="1" lang="ja-JP" altLang="en-US" smtClean="0"/>
-              <a:t>2025/3/5</a:t>
+              <a:t>2025/9/29</a:t>
             </a:fld>
             <a:endParaRPr kumimoji="1" lang="ja-JP" altLang="en-US"/>
           </a:p>
@@ -3208,7 +3208,7 @@
           <a:p>
             <a:fld id="{E9CC885B-4903-4D54-9A93-00025F12DED9}" type="datetimeFigureOut">
               <a:rPr kumimoji="1" lang="ja-JP" altLang="en-US" smtClean="0"/>
-              <a:t>2025/3/5</a:t>
+              <a:t>2025/9/29</a:t>
             </a:fld>
             <a:endParaRPr kumimoji="1" lang="ja-JP" altLang="en-US"/>
           </a:p>
@@ -5350,16 +5350,7 @@
                       <a:rPr lang="ja-JP" altLang="en-US" sz="2400" i="1">
                         <a:latin typeface="Cambria Math" panose="02040503050406030204" pitchFamily="18" charset="0"/>
                       </a:rPr>
-                      <m:t>≒2.</m:t>
-                    </m:r>
-                    <m:r>
-                      <a:rPr lang="en-US" altLang="ja-JP" sz="2400" b="0" i="1" smtClean="0">
-                        <a:solidFill>
-                          <a:srgbClr val="FF0000"/>
-                        </a:solidFill>
-                        <a:latin typeface="Cambria Math" panose="02040503050406030204" pitchFamily="18" charset="0"/>
-                      </a:rPr>
-                      <m:t>55</m:t>
+                      <m:t>≒2.55</m:t>
                     </m:r>
                     <m:r>
                       <a:rPr lang="ja-JP" altLang="en-US" sz="2400" i="1">
@@ -13217,8 +13208,8 @@
           </a:p>
         </p:txBody>
       </p:sp>
-      <mc:AlternateContent xmlns:mc="http://schemas.openxmlformats.org/markup-compatibility/2006" xmlns:a14="http://schemas.microsoft.com/office/drawing/2010/main">
-        <mc:Choice Requires="a14">
+      <mc:AlternateContent xmlns:mc="http://schemas.openxmlformats.org/markup-compatibility/2006">
+        <mc:Choice xmlns:a14="http://schemas.microsoft.com/office/drawing/2010/main" Requires="a14">
           <p:sp>
             <p:nvSpPr>
               <p:cNvPr id="5" name="テキスト ボックス 4">
@@ -13768,7 +13759,19 @@
                           <a:rPr lang="en-US" altLang="ja-JP" sz="2400" b="0" i="1" dirty="0" smtClean="0">
                             <a:latin typeface="Cambria Math" panose="02040503050406030204" pitchFamily="18" charset="0"/>
                           </a:rPr>
-                          <m:t>49</m:t>
+                          <m:t>4</m:t>
+                        </m:r>
+                        <m:r>
+                          <a:rPr lang="en-US" altLang="ja-JP" sz="2400" b="0" i="1" dirty="0" smtClean="0">
+                            <a:latin typeface="Cambria Math" panose="02040503050406030204" pitchFamily="18" charset="0"/>
+                          </a:rPr>
+                          <m:t>.</m:t>
+                        </m:r>
+                        <m:r>
+                          <a:rPr lang="en-US" altLang="ja-JP" sz="2400" b="0" i="1" dirty="0" smtClean="0">
+                            <a:latin typeface="Cambria Math" panose="02040503050406030204" pitchFamily="18" charset="0"/>
+                          </a:rPr>
+                          <m:t>9</m:t>
                         </m:r>
                       </m:den>
                     </m:f>
@@ -13864,7 +13867,25 @@
                                 </a:solidFill>
                                 <a:latin typeface="Cambria Math" panose="02040503050406030204" pitchFamily="18" charset="0"/>
                               </a:rPr>
-                              <m:t>49</m:t>
+                              <m:t>4</m:t>
+                            </m:r>
+                            <m:r>
+                              <a:rPr lang="en-US" altLang="ja-JP" sz="2400" b="0" i="1" dirty="0" smtClean="0">
+                                <a:solidFill>
+                                  <a:srgbClr val="FF0000"/>
+                                </a:solidFill>
+                                <a:latin typeface="Cambria Math" panose="02040503050406030204" pitchFamily="18" charset="0"/>
+                              </a:rPr>
+                              <m:t>.</m:t>
+                            </m:r>
+                            <m:r>
+                              <a:rPr lang="en-US" altLang="ja-JP" sz="2400" i="1" dirty="0">
+                                <a:solidFill>
+                                  <a:srgbClr val="FF0000"/>
+                                </a:solidFill>
+                                <a:latin typeface="Cambria Math" panose="02040503050406030204" pitchFamily="18" charset="0"/>
+                              </a:rPr>
+                              <m:t>9</m:t>
                             </m:r>
                           </m:den>
                         </m:f>
@@ -13889,7 +13910,7 @@
             </p:txBody>
           </p:sp>
         </mc:Choice>
-        <mc:Fallback xmlns="">
+        <mc:Fallback>
           <p:sp>
             <p:nvSpPr>
               <p:cNvPr id="5" name="テキスト ボックス 4">
